--- a/docs/presentation/IFMP-Retail-deck-v1.pptx
+++ b/docs/presentation/IFMP-Retail-deck-v1.pptx
@@ -24,6 +24,7 @@
     <p:sldId id="272" r:id="rId23"/>
     <p:sldId id="273" r:id="rId24"/>
     <p:sldId id="274" r:id="rId25"/>
+    <p:sldId id="275" r:id="rId26"/>
   </p:sldIdLst>
   <p:sldSz cx="12192000" cy="6858000"/>
   <p:notesSz cx="6858000" cy="9144000"/>
@@ -1010,7 +1011,7 @@
           <a:lstStyle/>
           <a:p>
             <a:r>
-              <a:t>誠實區分已上線與未上線。這頁係客戶最需要聽清楚的一頁。</a:t>
+              <a:t>誠實區分已上線與未上線。這頁係客戶最需要聽清楚的一頁。下一頁會展開開發中那批。</a:t>
             </a:r>
           </a:p>
         </p:txBody>
@@ -1080,7 +1081,7 @@
           <a:lstStyle/>
           <a:p>
             <a:r>
-              <a:t>這頁係交付方價值：不止賣軟件，而是包含落地工作。</a:t>
+              <a:t>呢頁係全場重點：由「睇得到」去「做得到」。強調推算而非影像，係為咗答隱私問題，同時交付門檻較低。</a:t>
             </a:r>
           </a:p>
         </p:txBody>
@@ -1150,7 +1151,7 @@
           <a:lstStyle/>
           <a:p>
             <a:r>
-              <a:t>收束為具體決定事項，不留空泛承諾。</a:t>
+              <a:t>這頁係交付方價值：不止賣軟件，而是包含落地工作。</a:t>
             </a:r>
           </a:p>
         </p:txBody>
@@ -1220,7 +1221,7 @@
           <a:lstStyle/>
           <a:p>
             <a:r>
-              <a:t>留時間問答。可就隱私、權限、時程回應。</a:t>
+              <a:t>收束為具體決定事項，不留空泛承諾。</a:t>
             </a:r>
           </a:p>
         </p:txBody>
@@ -1291,6 +1292,76 @@
           <a:p>
             <a:r>
               <a:t>今日會見到已上線畫面，以及尚未上線的路線圖，兩者會明確區分。</a:t>
+            </a:r>
+          </a:p>
+        </p:txBody>
+      </p:sp>
+      <p:sp>
+        <p:nvSpPr>
+          <p:cNvPr id="4" name="Slide Number Placeholder 3"/>
+          <p:cNvSpPr>
+            <a:spLocks noGrp="1"/>
+          </p:cNvSpPr>
+          <p:nvPr>
+            <p:ph type="sldNum" idx="5" sz="quarter"/>
+          </p:nvPr>
+        </p:nvSpPr>
+        <p:spPr/>
+      </p:sp>
+    </p:spTree>
+  </p:cSld>
+  <p:clrMapOvr>
+    <a:masterClrMapping/>
+  </p:clrMapOvr>
+</p:notes>
+</file>
+
+<file path=ppt/notesSlides/notesSlide20.xml><?xml version="1.0" encoding="utf-8"?>
+<p:notes xmlns:a="http://schemas.openxmlformats.org/drawingml/2006/main" xmlns:p="http://schemas.openxmlformats.org/presentationml/2006/main" xmlns:r="http://schemas.openxmlformats.org/officeDocument/2006/relationships">
+  <p:cSld>
+    <p:spTree>
+      <p:nvGrpSpPr>
+        <p:cNvPr id="1" name=""/>
+        <p:cNvGrpSpPr/>
+        <p:nvPr/>
+      </p:nvGrpSpPr>
+      <p:grpSpPr>
+        <a:xfrm>
+          <a:off x="0" y="0"/>
+          <a:ext cx="0" cy="0"/>
+          <a:chOff x="0" y="0"/>
+          <a:chExt cx="0" cy="0"/>
+        </a:xfrm>
+      </p:grpSpPr>
+      <p:sp>
+        <p:nvSpPr>
+          <p:cNvPr id="2" name="Slide Image Placeholder 1"/>
+          <p:cNvSpPr>
+            <a:spLocks noGrp="1"/>
+          </p:cNvSpPr>
+          <p:nvPr>
+            <p:ph type="sldImg" idx="2"/>
+          </p:nvPr>
+        </p:nvSpPr>
+        <p:spPr/>
+      </p:sp>
+      <p:sp>
+        <p:nvSpPr>
+          <p:cNvPr id="3" name="Notes Placeholder 2"/>
+          <p:cNvSpPr>
+            <a:spLocks noGrp="1"/>
+          </p:cNvSpPr>
+          <p:nvPr>
+            <p:ph type="body" idx="3" sz="quarter"/>
+          </p:nvPr>
+        </p:nvSpPr>
+        <p:spPr/>
+        <p:txBody>
+          <a:bodyPr/>
+          <a:lstStyle/>
+          <a:p>
+            <a:r>
+              <a:t>留時間問答。可就隱私、權限、時程回應。</a:t>
             </a:r>
           </a:p>
         </p:txBody>
@@ -7929,7 +8000,7 @@
         <p:spPr>
           <a:xfrm>
             <a:off x="457200" y="1634400"/>
-            <a:ext cx="3567239" cy="3816000"/>
+            <a:ext cx="3567239" cy="4031999"/>
           </a:xfrm>
           <a:prstGeom prst="roundRect">
             <a:avLst>
@@ -7977,7 +8048,7 @@
         <p:spPr>
           <a:xfrm>
             <a:off x="709200" y="1922400"/>
-            <a:ext cx="3063239" cy="3240000"/>
+            <a:ext cx="3063239" cy="3708000"/>
           </a:xfrm>
           <a:prstGeom prst="rect">
             <a:avLst/>
@@ -8144,7 +8215,7 @@
         <p:spPr>
           <a:xfrm>
             <a:off x="4312439" y="1634400"/>
-            <a:ext cx="3567239" cy="3816000"/>
+            <a:ext cx="3567239" cy="4031999"/>
           </a:xfrm>
           <a:prstGeom prst="roundRect">
             <a:avLst>
@@ -8192,7 +8263,7 @@
         <p:spPr>
           <a:xfrm>
             <a:off x="4564439" y="1922400"/>
-            <a:ext cx="3063239" cy="3240000"/>
+            <a:ext cx="3063239" cy="3708000"/>
           </a:xfrm>
           <a:prstGeom prst="rect">
             <a:avLst/>
@@ -8249,7 +8320,7 @@
                 <a:ea typeface="微軟正黑體"/>
                 <a:cs typeface="微軟正黑體"/>
               </a:rPr>
-              <a:t>· 服務缺口告警：高停留區域連續約 2 分鐘無人服務</a:t>
+              <a:t>· 服務缺口偵測：區域人流超出當班人手負荷</a:t>
             </a:r>
           </a:p>
           <a:p>
@@ -8297,7 +8368,7 @@
                 <a:ea typeface="微軟正黑體"/>
                 <a:cs typeface="微軟正黑體"/>
               </a:rPr>
-              <a:t>· 服務教練：缺口與片段帶入週會</a:t>
+              <a:t>· 服務教練：缺口事件帶入週會，由店長撰寫評語</a:t>
             </a:r>
           </a:p>
           <a:p>
@@ -8321,6 +8392,30 @@
                 <a:ea typeface="微軟正黑體"/>
                 <a:cs typeface="微軟正黑體"/>
               </a:rPr>
+              <a:t>· 成本與效率：成本模擬、超時預警、排班建議</a:t>
+            </a:r>
+          </a:p>
+          <a:p>
+            <a:pPr algn="l">
+              <a:lnSpc>
+                <a:spcPct val="128000"/>
+              </a:lnSpc>
+              <a:spcBef>
+                <a:spcPts val="0"/>
+              </a:spcBef>
+              <a:spcAft>
+                <a:spcPts val="900"/>
+              </a:spcAft>
+            </a:pPr>
+            <a:r>
+              <a:rPr sz="1400" b="0">
+                <a:solidFill>
+                  <a:srgbClr val="333333"/>
+                </a:solidFill>
+                <a:latin typeface="Calibri"/>
+                <a:ea typeface="微軟正黑體"/>
+                <a:cs typeface="微軟正黑體"/>
+              </a:rPr>
               <a:t>· 首輪接觸目標秒數，可配置，預設 90 秒</a:t>
             </a:r>
           </a:p>
@@ -8335,7 +8430,7 @@
         <p:spPr>
           <a:xfrm>
             <a:off x="8167679" y="1634400"/>
-            <a:ext cx="3567239" cy="3816000"/>
+            <a:ext cx="3567239" cy="4031999"/>
           </a:xfrm>
           <a:prstGeom prst="roundRect">
             <a:avLst>
@@ -8383,7 +8478,7 @@
         <p:spPr>
           <a:xfrm>
             <a:off x="8419679" y="1922400"/>
-            <a:ext cx="3063239" cy="3240000"/>
+            <a:ext cx="3063239" cy="3708000"/>
           </a:xfrm>
           <a:prstGeom prst="rect">
             <a:avLst/>
@@ -8464,6 +8559,30 @@
                 <a:ea typeface="微軟正黑體"/>
                 <a:cs typeface="微軟正黑體"/>
               </a:rPr>
+              <a:t>· 真實影像回放</a:t>
+            </a:r>
+          </a:p>
+          <a:p>
+            <a:pPr algn="l">
+              <a:lnSpc>
+                <a:spcPct val="128000"/>
+              </a:lnSpc>
+              <a:spcBef>
+                <a:spcPts val="0"/>
+              </a:spcBef>
+              <a:spcAft>
+                <a:spcPts val="900"/>
+              </a:spcAft>
+            </a:pPr>
+            <a:r>
+              <a:rPr sz="1400" b="0">
+                <a:solidFill>
+                  <a:srgbClr val="333333"/>
+                </a:solidFill>
+                <a:latin typeface="Calibri"/>
+                <a:ea typeface="微軟正黑體"/>
+                <a:cs typeface="微軟正黑體"/>
+              </a:rPr>
               <a:t>· 能源監測，具備控制權後再談聯動</a:t>
             </a:r>
           </a:p>
@@ -8477,7 +8596,7 @@
         </p:nvSpPr>
         <p:spPr>
           <a:xfrm>
-            <a:off x="457200" y="5594400"/>
+            <a:off x="457200" y="5702400"/>
             <a:ext cx="11277719" cy="324000"/>
           </a:xfrm>
           <a:prstGeom prst="rect">
@@ -8682,7 +8801,7 @@
                 <a:ea typeface="微軟正黑體"/>
                 <a:cs typeface="微軟正黑體"/>
               </a:rPr>
-              <a:t>HKIT 實施服務</a:t>
+              <a:t>行動層（開發中）</a:t>
             </a:r>
           </a:p>
         </p:txBody>
@@ -8696,19 +8815,19 @@
         <p:spPr>
           <a:xfrm>
             <a:off x="457200" y="1616400"/>
-            <a:ext cx="11277719" cy="774719"/>
+            <a:ext cx="3519239" cy="1440000"/>
           </a:xfrm>
           <a:prstGeom prst="roundRect">
             <a:avLst>
-              <a:gd name="adj" fmla="val 10000"/>
+              <a:gd name="adj" fmla="val 8000"/>
             </a:avLst>
           </a:prstGeom>
           <a:solidFill>
             <a:srgbClr val="F2F6FA"/>
           </a:solidFill>
-          <a:ln w="9525">
+          <a:ln w="12700">
             <a:solidFill>
-              <a:srgbClr val="D6DEE8"/>
+              <a:srgbClr val="4F81BD"/>
             </a:solidFill>
           </a:ln>
           <a:effectLst/>
@@ -8743,8 +8862,8 @@
         </p:nvSpPr>
         <p:spPr>
           <a:xfrm>
-            <a:off x="745200" y="1695600"/>
-            <a:ext cx="2736000" cy="630719"/>
+            <a:off x="709200" y="1796400"/>
+            <a:ext cx="3015239" cy="1080000"/>
           </a:xfrm>
           <a:prstGeom prst="rect">
             <a:avLst/>
@@ -8752,7 +8871,7 @@
           <a:noFill/>
         </p:spPr>
         <p:txBody>
-          <a:bodyPr wrap="square" lIns="0" rIns="0" tIns="0" bIns="0" anchor="ctr">
+          <a:bodyPr wrap="square" lIns="0" rIns="0" tIns="0" bIns="0">
             <a:spAutoFit/>
           </a:bodyPr>
           <a:lstStyle/>
@@ -8765,11 +8884,11 @@
                 <a:spcPts val="0"/>
               </a:spcBef>
               <a:spcAft>
-                <a:spcPts val="0"/>
+                <a:spcPts val="1000"/>
               </a:spcAft>
             </a:pPr>
             <a:r>
-              <a:rPr sz="1700" b="1">
+              <a:rPr sz="1800" b="1">
                 <a:solidFill>
                   <a:srgbClr val="1F497D"/>
                 </a:solidFill>
@@ -8777,7 +8896,31 @@
                 <a:ea typeface="微軟正黑體"/>
                 <a:cs typeface="微軟正黑體"/>
               </a:rPr>
-              <a:t>現場標定</a:t>
+              <a:t>服務缺口偵測</a:t>
+            </a:r>
+          </a:p>
+          <a:p>
+            <a:pPr algn="l">
+              <a:lnSpc>
+                <a:spcPct val="130000"/>
+              </a:lnSpc>
+              <a:spcBef>
+                <a:spcPts val="0"/>
+              </a:spcBef>
+              <a:spcAft>
+                <a:spcPts val="0"/>
+              </a:spcAft>
+            </a:pPr>
+            <a:r>
+              <a:rPr sz="1400" b="0">
+                <a:solidFill>
+                  <a:srgbClr val="333333"/>
+                </a:solidFill>
+                <a:latin typeface="Calibri"/>
+                <a:ea typeface="微軟正黑體"/>
+                <a:cs typeface="微軟正黑體"/>
+              </a:rPr>
+              <a:t>區域人流超出當班人手負荷，即發出告警。</a:t>
             </a:r>
           </a:p>
         </p:txBody>
@@ -8790,8 +8933,8 @@
         </p:nvSpPr>
         <p:spPr>
           <a:xfrm>
-            <a:off x="3553199" y="1695600"/>
-            <a:ext cx="7893719" cy="630719"/>
+            <a:off x="3976439" y="1616400"/>
+            <a:ext cx="360000" cy="1440000"/>
           </a:xfrm>
           <a:prstGeom prst="rect">
             <a:avLst/>
@@ -8804,9 +8947,9 @@
           </a:bodyPr>
           <a:lstStyle/>
           <a:p>
-            <a:pPr algn="l">
+            <a:pPr algn="ctr">
               <a:lnSpc>
-                <a:spcPct val="125000"/>
+                <a:spcPct val="118000"/>
               </a:lnSpc>
               <a:spcBef>
                 <a:spcPts val="0"/>
@@ -8816,15 +8959,15 @@
               </a:spcAft>
             </a:pPr>
             <a:r>
-              <a:rPr sz="1500" b="0">
-                <a:solidFill>
-                  <a:srgbClr val="333333"/>
-                </a:solidFill>
-                <a:latin typeface="Calibri"/>
-                <a:ea typeface="微軟正黑體"/>
-                <a:cs typeface="微軟正黑體"/>
-              </a:rPr>
-              <a:t>攝像位置與區域界線勘定，確保計數與停留判定準確。</a:t>
+              <a:rPr sz="1300" b="0">
+                <a:solidFill>
+                  <a:srgbClr val="4F81BD"/>
+                </a:solidFill>
+                <a:latin typeface="Calibri"/>
+                <a:ea typeface="微軟正黑體"/>
+                <a:cs typeface="微軟正黑體"/>
+              </a:rPr>
+              <a:t>▶</a:t>
             </a:r>
           </a:p>
         </p:txBody>
@@ -8837,20 +8980,20 @@
         </p:nvSpPr>
         <p:spPr>
           <a:xfrm>
-            <a:off x="457200" y="2553120"/>
-            <a:ext cx="11277719" cy="774719"/>
+            <a:off x="4336439" y="1616400"/>
+            <a:ext cx="3519239" cy="1440000"/>
           </a:xfrm>
           <a:prstGeom prst="roundRect">
             <a:avLst>
-              <a:gd name="adj" fmla="val 10000"/>
+              <a:gd name="adj" fmla="val 8000"/>
             </a:avLst>
           </a:prstGeom>
           <a:solidFill>
-            <a:srgbClr val="FFFFFF"/>
+            <a:srgbClr val="F2F6FA"/>
           </a:solidFill>
-          <a:ln w="9525">
+          <a:ln w="12700">
             <a:solidFill>
-              <a:srgbClr val="D6DEE8"/>
+              <a:srgbClr val="4F81BD"/>
             </a:solidFill>
           </a:ln>
           <a:effectLst/>
@@ -8885,8 +9028,8 @@
         </p:nvSpPr>
         <p:spPr>
           <a:xfrm>
-            <a:off x="745200" y="2632320"/>
-            <a:ext cx="2736000" cy="630719"/>
+            <a:off x="4588439" y="1796400"/>
+            <a:ext cx="3015239" cy="1080000"/>
           </a:xfrm>
           <a:prstGeom prst="rect">
             <a:avLst/>
@@ -8894,7 +9037,7 @@
           <a:noFill/>
         </p:spPr>
         <p:txBody>
-          <a:bodyPr wrap="square" lIns="0" rIns="0" tIns="0" bIns="0" anchor="ctr">
+          <a:bodyPr wrap="square" lIns="0" rIns="0" tIns="0" bIns="0">
             <a:spAutoFit/>
           </a:bodyPr>
           <a:lstStyle/>
@@ -8907,11 +9050,11 @@
                 <a:spcPts val="0"/>
               </a:spcBef>
               <a:spcAft>
-                <a:spcPts val="0"/>
+                <a:spcPts val="1000"/>
               </a:spcAft>
             </a:pPr>
             <a:r>
-              <a:rPr sz="1700" b="1">
+              <a:rPr sz="1800" b="1">
                 <a:solidFill>
                   <a:srgbClr val="1F497D"/>
                 </a:solidFill>
@@ -8919,7 +9062,31 @@
                 <a:ea typeface="微軟正黑體"/>
                 <a:cs typeface="微軟正黑體"/>
               </a:rPr>
-              <a:t>平台對接</a:t>
+              <a:t>一鍵調度</a:t>
+            </a:r>
+          </a:p>
+          <a:p>
+            <a:pPr algn="l">
+              <a:lnSpc>
+                <a:spcPct val="130000"/>
+              </a:lnSpc>
+              <a:spcBef>
+                <a:spcPts val="0"/>
+              </a:spcBef>
+              <a:spcAft>
+                <a:spcPts val="0"/>
+              </a:spcAft>
+            </a:pPr>
+            <a:r>
+              <a:rPr sz="1400" b="0">
+                <a:solidFill>
+                  <a:srgbClr val="333333"/>
+                </a:solidFill>
+                <a:latin typeface="Calibri"/>
+                <a:ea typeface="微軟正黑體"/>
+                <a:cs typeface="微軟正黑體"/>
+              </a:rPr>
+              <a:t>由缺口事件直接指派當班同事支援，並記錄結果。</a:t>
             </a:r>
           </a:p>
         </p:txBody>
@@ -8932,8 +9099,8 @@
         </p:nvSpPr>
         <p:spPr>
           <a:xfrm>
-            <a:off x="3553199" y="2632320"/>
-            <a:ext cx="7893719" cy="630719"/>
+            <a:off x="7855679" y="1616400"/>
+            <a:ext cx="360000" cy="1440000"/>
           </a:xfrm>
           <a:prstGeom prst="rect">
             <a:avLst/>
@@ -8946,9 +9113,9 @@
           </a:bodyPr>
           <a:lstStyle/>
           <a:p>
-            <a:pPr algn="l">
+            <a:pPr algn="ctr">
               <a:lnSpc>
-                <a:spcPct val="125000"/>
+                <a:spcPct val="118000"/>
               </a:lnSpc>
               <a:spcBef>
                 <a:spcPts val="0"/>
@@ -8958,15 +9125,15 @@
               </a:spcAft>
             </a:pPr>
             <a:r>
-              <a:rPr sz="1500" b="0">
-                <a:solidFill>
-                  <a:srgbClr val="333333"/>
-                </a:solidFill>
-                <a:latin typeface="Calibri"/>
-                <a:ea typeface="微軟正黑體"/>
-                <a:cs typeface="微軟正黑體"/>
-              </a:rPr>
-              <a:t>一見事件接入 IFMP，設定規則閾值與告警條件。</a:t>
+              <a:rPr sz="1300" b="0">
+                <a:solidFill>
+                  <a:srgbClr val="4F81BD"/>
+                </a:solidFill>
+                <a:latin typeface="Calibri"/>
+                <a:ea typeface="微軟正黑體"/>
+                <a:cs typeface="微軟正黑體"/>
+              </a:rPr>
+              <a:t>▶</a:t>
             </a:r>
           </a:p>
         </p:txBody>
@@ -8979,20 +9146,20 @@
         </p:nvSpPr>
         <p:spPr>
           <a:xfrm>
-            <a:off x="457200" y="3489839"/>
-            <a:ext cx="11277719" cy="774719"/>
+            <a:off x="8215679" y="1616400"/>
+            <a:ext cx="3519239" cy="1440000"/>
           </a:xfrm>
           <a:prstGeom prst="roundRect">
             <a:avLst>
-              <a:gd name="adj" fmla="val 10000"/>
+              <a:gd name="adj" fmla="val 8000"/>
             </a:avLst>
           </a:prstGeom>
           <a:solidFill>
             <a:srgbClr val="F2F6FA"/>
           </a:solidFill>
-          <a:ln w="9525">
+          <a:ln w="12700">
             <a:solidFill>
-              <a:srgbClr val="D6DEE8"/>
+              <a:srgbClr val="4F81BD"/>
             </a:solidFill>
           </a:ln>
           <a:effectLst/>
@@ -9027,8 +9194,8 @@
         </p:nvSpPr>
         <p:spPr>
           <a:xfrm>
-            <a:off x="745200" y="3569040"/>
-            <a:ext cx="2736000" cy="630719"/>
+            <a:off x="8467679" y="1796400"/>
+            <a:ext cx="3015239" cy="1080000"/>
           </a:xfrm>
           <a:prstGeom prst="rect">
             <a:avLst/>
@@ -9036,7 +9203,7 @@
           <a:noFill/>
         </p:spPr>
         <p:txBody>
-          <a:bodyPr wrap="square" lIns="0" rIns="0" tIns="0" bIns="0" anchor="ctr">
+          <a:bodyPr wrap="square" lIns="0" rIns="0" tIns="0" bIns="0">
             <a:spAutoFit/>
           </a:bodyPr>
           <a:lstStyle/>
@@ -9049,11 +9216,11 @@
                 <a:spcPts val="0"/>
               </a:spcBef>
               <a:spcAft>
-                <a:spcPts val="0"/>
+                <a:spcPts val="1000"/>
               </a:spcAft>
             </a:pPr>
             <a:r>
-              <a:rPr sz="1700" b="1">
+              <a:rPr sz="1800" b="1">
                 <a:solidFill>
                   <a:srgbClr val="1F497D"/>
                 </a:solidFill>
@@ -9061,7 +9228,31 @@
                 <a:ea typeface="微軟正黑體"/>
                 <a:cs typeface="微軟正黑體"/>
               </a:rPr>
-              <a:t>平面圖與區域設定</a:t>
+              <a:t>週會教練</a:t>
+            </a:r>
+          </a:p>
+          <a:p>
+            <a:pPr algn="l">
+              <a:lnSpc>
+                <a:spcPct val="130000"/>
+              </a:lnSpc>
+              <a:spcBef>
+                <a:spcPts val="0"/>
+              </a:spcBef>
+              <a:spcAft>
+                <a:spcPts val="0"/>
+              </a:spcAft>
+            </a:pPr>
+            <a:r>
+              <a:rPr sz="1400" b="0">
+                <a:solidFill>
+                  <a:srgbClr val="333333"/>
+                </a:solidFill>
+                <a:latin typeface="Calibri"/>
+                <a:ea typeface="微軟正黑體"/>
+                <a:cs typeface="微軟正黑體"/>
+              </a:rPr>
+              <a:t>缺口事件帶入週會，由店長撰寫觀察與行動項目。</a:t>
             </a:r>
           </a:p>
         </p:txBody>
@@ -9074,8 +9265,8 @@
         </p:nvSpPr>
         <p:spPr>
           <a:xfrm>
-            <a:off x="3553199" y="3569040"/>
-            <a:ext cx="7893719" cy="630719"/>
+            <a:off x="457200" y="3128400"/>
+            <a:ext cx="11277719" cy="288000"/>
           </a:xfrm>
           <a:prstGeom prst="rect">
             <a:avLst/>
@@ -9083,14 +9274,14 @@
           <a:noFill/>
         </p:spPr>
         <p:txBody>
-          <a:bodyPr wrap="square" lIns="0" rIns="0" tIns="0" bIns="0" anchor="ctr">
+          <a:bodyPr wrap="square" lIns="0" rIns="0" tIns="0" bIns="0">
             <a:spAutoFit/>
           </a:bodyPr>
           <a:lstStyle/>
           <a:p>
             <a:pPr algn="l">
               <a:lnSpc>
-                <a:spcPct val="125000"/>
+                <a:spcPct val="118000"/>
               </a:lnSpc>
               <a:spcBef>
                 <a:spcPts val="0"/>
@@ -9102,27 +9293,74 @@
             <a:r>
               <a:rPr sz="1500" b="0">
                 <a:solidFill>
-                  <a:srgbClr val="333333"/>
-                </a:solidFill>
-                <a:latin typeface="Calibri"/>
-                <a:ea typeface="微軟正黑體"/>
-                <a:cs typeface="微軟正黑體"/>
-              </a:rPr>
-              <a:t>依真實門店平面圖完成區域定義，介面沿用現有結構。</a:t>
-            </a:r>
-          </a:p>
-        </p:txBody>
-      </p:sp>
-      <p:sp>
-        <p:nvSpPr>
-          <p:cNvPr id="12" name="Rounded Rectangle 11"/>
+                  <a:srgbClr val="1F497D"/>
+                </a:solidFill>
+                <a:latin typeface="Calibri"/>
+                <a:ea typeface="微軟正黑體"/>
+                <a:cs typeface="微軟正黑體"/>
+              </a:rPr>
+              <a:t>三步構成閉環：偵測、處理、複盤。這是「看得見」之後缺的那一半。</a:t>
+            </a:r>
+          </a:p>
+        </p:txBody>
+      </p:sp>
+      <p:sp>
+        <p:nvSpPr>
+          <p:cNvPr id="12" name="TextBox 11"/>
+          <p:cNvSpPr txBox="1"/>
+          <p:nvPr/>
+        </p:nvSpPr>
+        <p:spPr>
+          <a:xfrm>
+            <a:off x="457200" y="3470400"/>
+            <a:ext cx="11277719" cy="288000"/>
+          </a:xfrm>
+          <a:prstGeom prst="rect">
+            <a:avLst/>
+          </a:prstGeom>
+          <a:noFill/>
+        </p:spPr>
+        <p:txBody>
+          <a:bodyPr wrap="square" lIns="0" rIns="0" tIns="0" bIns="0">
+            <a:spAutoFit/>
+          </a:bodyPr>
+          <a:lstStyle/>
+          <a:p>
+            <a:pPr algn="l">
+              <a:lnSpc>
+                <a:spcPct val="118000"/>
+              </a:lnSpc>
+              <a:spcBef>
+                <a:spcPts val="0"/>
+              </a:spcBef>
+              <a:spcAft>
+                <a:spcPts val="0"/>
+              </a:spcAft>
+            </a:pPr>
+            <a:r>
+              <a:rPr sz="1900" b="1">
+                <a:solidFill>
+                  <a:srgbClr val="1F497D"/>
+                </a:solidFill>
+                <a:latin typeface="Calibri"/>
+                <a:ea typeface="微軟正黑體"/>
+                <a:cs typeface="微軟正黑體"/>
+              </a:rPr>
+              <a:t>同時加入效率與成本</a:t>
+            </a:r>
+          </a:p>
+        </p:txBody>
+      </p:sp>
+      <p:sp>
+        <p:nvSpPr>
+          <p:cNvPr id="13" name="Rounded Rectangle 12"/>
           <p:cNvSpPr/>
           <p:nvPr/>
         </p:nvSpPr>
         <p:spPr>
           <a:xfrm>
-            <a:off x="457200" y="4426560"/>
-            <a:ext cx="11277719" cy="774719"/>
+            <a:off x="457200" y="3794399"/>
+            <a:ext cx="11277719" cy="360000"/>
           </a:xfrm>
           <a:prstGeom prst="roundRect">
             <a:avLst>
@@ -9130,7 +9368,7 @@
             </a:avLst>
           </a:prstGeom>
           <a:solidFill>
-            <a:srgbClr val="FFFFFF"/>
+            <a:srgbClr val="F2F6FA"/>
           </a:solidFill>
           <a:ln w="9525">
             <a:solidFill>
@@ -9163,14 +9401,14 @@
       </p:sp>
       <p:sp>
         <p:nvSpPr>
-          <p:cNvPr id="13" name="TextBox 12"/>
+          <p:cNvPr id="14" name="TextBox 13"/>
           <p:cNvSpPr txBox="1"/>
           <p:nvPr/>
         </p:nvSpPr>
         <p:spPr>
           <a:xfrm>
-            <a:off x="745200" y="4505760"/>
-            <a:ext cx="2736000" cy="630719"/>
+            <a:off x="745200" y="3848400"/>
+            <a:ext cx="2520000" cy="251999"/>
           </a:xfrm>
           <a:prstGeom prst="rect">
             <a:avLst/>
@@ -9195,7 +9433,7 @@
               </a:spcAft>
             </a:pPr>
             <a:r>
-              <a:rPr sz="1700" b="1">
+              <a:rPr sz="1600" b="1">
                 <a:solidFill>
                   <a:srgbClr val="1F497D"/>
                 </a:solidFill>
@@ -9203,21 +9441,21 @@
                 <a:ea typeface="微軟正黑體"/>
                 <a:cs typeface="微軟正黑體"/>
               </a:rPr>
-              <a:t>人員識別基礎</a:t>
-            </a:r>
-          </a:p>
-        </p:txBody>
-      </p:sp>
-      <p:sp>
-        <p:nvSpPr>
-          <p:cNvPr id="14" name="TextBox 13"/>
+              <a:t>人力成本模擬</a:t>
+            </a:r>
+          </a:p>
+        </p:txBody>
+      </p:sp>
+      <p:sp>
+        <p:nvSpPr>
+          <p:cNvPr id="15" name="TextBox 14"/>
           <p:cNvSpPr txBox="1"/>
           <p:nvPr/>
         </p:nvSpPr>
         <p:spPr>
           <a:xfrm>
-            <a:off x="3553199" y="4505760"/>
-            <a:ext cx="7893719" cy="630719"/>
+            <a:off x="3553199" y="3848400"/>
+            <a:ext cx="7893719" cy="251999"/>
           </a:xfrm>
           <a:prstGeom prst="rect">
             <a:avLst/>
@@ -9242,7 +9480,7 @@
               </a:spcAft>
             </a:pPr>
             <a:r>
-              <a:rPr sz="1500" b="0">
+              <a:rPr sz="1400" b="0">
                 <a:solidFill>
                   <a:srgbClr val="333333"/>
                 </a:solidFill>
@@ -9250,21 +9488,21 @@
                 <a:ea typeface="微軟正黑體"/>
                 <a:cs typeface="微軟正黑體"/>
               </a:rPr>
-              <a:t>建立工服與排班對照基礎，供人員分類使用。</a:t>
-            </a:r>
-          </a:p>
-        </p:txBody>
-      </p:sp>
-      <p:sp>
-        <p:nvSpPr>
-          <p:cNvPr id="15" name="Rounded Rectangle 14"/>
+              <a:t>在發佈更表之前，先看清本週人力成本與超時加費。</a:t>
+            </a:r>
+          </a:p>
+        </p:txBody>
+      </p:sp>
+      <p:sp>
+        <p:nvSpPr>
+          <p:cNvPr id="16" name="Rounded Rectangle 15"/>
           <p:cNvSpPr/>
           <p:nvPr/>
         </p:nvSpPr>
         <p:spPr>
           <a:xfrm>
-            <a:off x="457200" y="5363280"/>
-            <a:ext cx="11277719" cy="774719"/>
+            <a:off x="457200" y="4208400"/>
+            <a:ext cx="11277719" cy="360000"/>
           </a:xfrm>
           <a:prstGeom prst="roundRect">
             <a:avLst>
@@ -9272,7 +9510,7 @@
             </a:avLst>
           </a:prstGeom>
           <a:solidFill>
-            <a:srgbClr val="F2F6FA"/>
+            <a:srgbClr val="FFFFFF"/>
           </a:solidFill>
           <a:ln w="9525">
             <a:solidFill>
@@ -9305,14 +9543,14 @@
       </p:sp>
       <p:sp>
         <p:nvSpPr>
-          <p:cNvPr id="16" name="TextBox 15"/>
+          <p:cNvPr id="17" name="TextBox 16"/>
           <p:cNvSpPr txBox="1"/>
           <p:nvPr/>
         </p:nvSpPr>
         <p:spPr>
           <a:xfrm>
-            <a:off x="745200" y="5442480"/>
-            <a:ext cx="2736000" cy="630719"/>
+            <a:off x="745200" y="4262400"/>
+            <a:ext cx="2520000" cy="251999"/>
           </a:xfrm>
           <a:prstGeom prst="rect">
             <a:avLst/>
@@ -9337,7 +9575,7 @@
               </a:spcAft>
             </a:pPr>
             <a:r>
-              <a:rPr sz="1700" b="1">
+              <a:rPr sz="1600" b="1">
                 <a:solidFill>
                   <a:srgbClr val="1F497D"/>
                 </a:solidFill>
@@ -9345,21 +9583,21 @@
                 <a:ea typeface="微軟正黑體"/>
                 <a:cs typeface="微軟正黑體"/>
               </a:rPr>
-              <a:t>培訓與支援</a:t>
-            </a:r>
-          </a:p>
-        </p:txBody>
-      </p:sp>
-      <p:sp>
-        <p:nvSpPr>
-          <p:cNvPr id="17" name="TextBox 16"/>
+              <a:t>超時預警</a:t>
+            </a:r>
+          </a:p>
+        </p:txBody>
+      </p:sp>
+      <p:sp>
+        <p:nvSpPr>
+          <p:cNvPr id="18" name="TextBox 17"/>
           <p:cNvSpPr txBox="1"/>
           <p:nvPr/>
         </p:nvSpPr>
         <p:spPr>
           <a:xfrm>
-            <a:off x="3553199" y="5442480"/>
-            <a:ext cx="7893719" cy="630719"/>
+            <a:off x="3553199" y="4262400"/>
+            <a:ext cx="7893719" cy="251999"/>
           </a:xfrm>
           <a:prstGeom prst="rect">
             <a:avLst/>
@@ -9384,7 +9622,7 @@
               </a:spcAft>
             </a:pPr>
             <a:r>
-              <a:rPr sz="1500" b="0">
+              <a:rPr sz="1400" b="0">
                 <a:solidFill>
                   <a:srgbClr val="333333"/>
                 </a:solidFill>
@@ -9392,21 +9630,69 @@
                 <a:ea typeface="微軟正黑體"/>
                 <a:cs typeface="微軟正黑體"/>
               </a:rPr>
-              <a:t>店長與營運培訓、週會複盤方法、上線後支援安排。</a:t>
-            </a:r>
-          </a:p>
-        </p:txBody>
-      </p:sp>
-      <p:sp>
-        <p:nvSpPr>
-          <p:cNvPr id="18" name="TextBox 17"/>
+              <a:t>發佈前提示預計超時時數與受影響員工，只作提示，不阻擋發佈。</a:t>
+            </a:r>
+          </a:p>
+        </p:txBody>
+      </p:sp>
+      <p:sp>
+        <p:nvSpPr>
+          <p:cNvPr id="19" name="Rounded Rectangle 18"/>
+          <p:cNvSpPr/>
+          <p:nvPr/>
+        </p:nvSpPr>
+        <p:spPr>
+          <a:xfrm>
+            <a:off x="457200" y="4622400"/>
+            <a:ext cx="11277719" cy="360000"/>
+          </a:xfrm>
+          <a:prstGeom prst="roundRect">
+            <a:avLst>
+              <a:gd name="adj" fmla="val 10000"/>
+            </a:avLst>
+          </a:prstGeom>
+          <a:solidFill>
+            <a:srgbClr val="F2F6FA"/>
+          </a:solidFill>
+          <a:ln w="9525">
+            <a:solidFill>
+              <a:srgbClr val="D6DEE8"/>
+            </a:solidFill>
+          </a:ln>
+          <a:effectLst/>
+        </p:spPr>
+        <p:style>
+          <a:lnRef idx="1">
+            <a:schemeClr val="accent1"/>
+          </a:lnRef>
+          <a:fillRef idx="3">
+            <a:schemeClr val="accent1"/>
+          </a:fillRef>
+          <a:effectRef idx="2">
+            <a:schemeClr val="accent1"/>
+          </a:effectRef>
+          <a:fontRef idx="minor">
+            <a:schemeClr val="lt1"/>
+          </a:fontRef>
+        </p:style>
+        <p:txBody>
+          <a:bodyPr rtlCol="0" anchor="ctr"/>
+          <a:lstStyle/>
+          <a:p>
+            <a:pPr algn="ctr"/>
+          </a:p>
+        </p:txBody>
+      </p:sp>
+      <p:sp>
+        <p:nvSpPr>
+          <p:cNvPr id="20" name="TextBox 19"/>
           <p:cNvSpPr txBox="1"/>
           <p:nvPr/>
         </p:nvSpPr>
         <p:spPr>
           <a:xfrm>
-            <a:off x="457200" y="6357600"/>
-            <a:ext cx="2134800" cy="363600"/>
+            <a:off x="745200" y="4676400"/>
+            <a:ext cx="2520000" cy="251999"/>
           </a:xfrm>
           <a:prstGeom prst="rect">
             <a:avLst/>
@@ -9418,12 +9704,437 @@
             <a:spAutoFit/>
           </a:bodyPr>
           <a:lstStyle/>
+          <a:p>
+            <a:pPr algn="l">
+              <a:lnSpc>
+                <a:spcPct val="118000"/>
+              </a:lnSpc>
+              <a:spcBef>
+                <a:spcPts val="0"/>
+              </a:spcBef>
+              <a:spcAft>
+                <a:spcPts val="0"/>
+              </a:spcAft>
+            </a:pPr>
+            <a:r>
+              <a:rPr sz="1600" b="1">
+                <a:solidFill>
+                  <a:srgbClr val="1F497D"/>
+                </a:solidFill>
+                <a:latin typeface="Calibri"/>
+                <a:ea typeface="微軟正黑體"/>
+                <a:cs typeface="微軟正黑體"/>
+              </a:rPr>
+              <a:t>自動排班建議</a:t>
+            </a:r>
+          </a:p>
+        </p:txBody>
+      </p:sp>
+      <p:sp>
+        <p:nvSpPr>
+          <p:cNvPr id="21" name="TextBox 20"/>
+          <p:cNvSpPr txBox="1"/>
+          <p:nvPr/>
+        </p:nvSpPr>
+        <p:spPr>
+          <a:xfrm>
+            <a:off x="3553199" y="4676400"/>
+            <a:ext cx="7893719" cy="251999"/>
+          </a:xfrm>
+          <a:prstGeom prst="rect">
+            <a:avLst/>
+          </a:prstGeom>
+          <a:noFill/>
+        </p:spPr>
+        <p:txBody>
+          <a:bodyPr wrap="square" lIns="0" rIns="0" tIns="0" bIns="0" anchor="ctr">
+            <a:spAutoFit/>
+          </a:bodyPr>
+          <a:lstStyle/>
+          <a:p>
+            <a:pPr algn="l">
+              <a:lnSpc>
+                <a:spcPct val="125000"/>
+              </a:lnSpc>
+              <a:spcBef>
+                <a:spcPts val="0"/>
+              </a:spcBef>
+              <a:spcAft>
+                <a:spcPts val="0"/>
+              </a:spcAft>
+            </a:pPr>
+            <a:r>
+              <a:rPr sz="1400" b="0">
+                <a:solidFill>
+                  <a:srgbClr val="333333"/>
+                </a:solidFill>
+                <a:latin typeface="Calibri"/>
+                <a:ea typeface="微軟正黑體"/>
+                <a:cs typeface="微軟正黑體"/>
+              </a:rPr>
+              <a:t>依過往需求建議班次，店長可逐項採用或放棄。</a:t>
+            </a:r>
+          </a:p>
+        </p:txBody>
+      </p:sp>
+      <p:sp>
+        <p:nvSpPr>
+          <p:cNvPr id="22" name="Rounded Rectangle 21"/>
+          <p:cNvSpPr/>
+          <p:nvPr/>
+        </p:nvSpPr>
+        <p:spPr>
+          <a:xfrm>
+            <a:off x="457200" y="5036399"/>
+            <a:ext cx="11277719" cy="360000"/>
+          </a:xfrm>
+          <a:prstGeom prst="roundRect">
+            <a:avLst>
+              <a:gd name="adj" fmla="val 10000"/>
+            </a:avLst>
+          </a:prstGeom>
+          <a:solidFill>
+            <a:srgbClr val="FFFFFF"/>
+          </a:solidFill>
+          <a:ln w="9525">
+            <a:solidFill>
+              <a:srgbClr val="D6DEE8"/>
+            </a:solidFill>
+          </a:ln>
+          <a:effectLst/>
+        </p:spPr>
+        <p:style>
+          <a:lnRef idx="1">
+            <a:schemeClr val="accent1"/>
+          </a:lnRef>
+          <a:fillRef idx="3">
+            <a:schemeClr val="accent1"/>
+          </a:fillRef>
+          <a:effectRef idx="2">
+            <a:schemeClr val="accent1"/>
+          </a:effectRef>
+          <a:fontRef idx="minor">
+            <a:schemeClr val="lt1"/>
+          </a:fontRef>
+        </p:style>
+        <p:txBody>
+          <a:bodyPr rtlCol="0" anchor="ctr"/>
+          <a:lstStyle/>
+          <a:p>
+            <a:pPr algn="ctr"/>
+          </a:p>
+        </p:txBody>
+      </p:sp>
+      <p:sp>
+        <p:nvSpPr>
+          <p:cNvPr id="23" name="TextBox 22"/>
+          <p:cNvSpPr txBox="1"/>
+          <p:nvPr/>
+        </p:nvSpPr>
+        <p:spPr>
+          <a:xfrm>
+            <a:off x="745200" y="5090400"/>
+            <a:ext cx="2520000" cy="251999"/>
+          </a:xfrm>
+          <a:prstGeom prst="rect">
+            <a:avLst/>
+          </a:prstGeom>
+          <a:noFill/>
+        </p:spPr>
+        <p:txBody>
+          <a:bodyPr wrap="square" lIns="0" rIns="0" tIns="0" bIns="0" anchor="ctr">
+            <a:spAutoFit/>
+          </a:bodyPr>
+          <a:lstStyle/>
+          <a:p>
+            <a:pPr algn="l">
+              <a:lnSpc>
+                <a:spcPct val="118000"/>
+              </a:lnSpc>
+              <a:spcBef>
+                <a:spcPts val="0"/>
+              </a:spcBef>
+              <a:spcAft>
+                <a:spcPts val="0"/>
+              </a:spcAft>
+            </a:pPr>
+            <a:r>
+              <a:rPr sz="1600" b="1">
+                <a:solidFill>
+                  <a:srgbClr val="1F497D"/>
+                </a:solidFill>
+                <a:latin typeface="Calibri"/>
+                <a:ea typeface="微軟正黑體"/>
+                <a:cs typeface="微軟正黑體"/>
+              </a:rPr>
+              <a:t>人手覆蓋提示</a:t>
+            </a:r>
+          </a:p>
+        </p:txBody>
+      </p:sp>
+      <p:sp>
+        <p:nvSpPr>
+          <p:cNvPr id="24" name="TextBox 23"/>
+          <p:cNvSpPr txBox="1"/>
+          <p:nvPr/>
+        </p:nvSpPr>
+        <p:spPr>
+          <a:xfrm>
+            <a:off x="3553199" y="5090400"/>
+            <a:ext cx="7893719" cy="251999"/>
+          </a:xfrm>
+          <a:prstGeom prst="rect">
+            <a:avLst/>
+          </a:prstGeom>
+          <a:noFill/>
+        </p:spPr>
+        <p:txBody>
+          <a:bodyPr wrap="square" lIns="0" rIns="0" tIns="0" bIns="0" anchor="ctr">
+            <a:spAutoFit/>
+          </a:bodyPr>
+          <a:lstStyle/>
+          <a:p>
+            <a:pPr algn="l">
+              <a:lnSpc>
+                <a:spcPct val="125000"/>
+              </a:lnSpc>
+              <a:spcBef>
+                <a:spcPts val="0"/>
+              </a:spcBef>
+              <a:spcAft>
+                <a:spcPts val="0"/>
+              </a:spcAft>
+            </a:pPr>
+            <a:r>
+              <a:rPr sz="1400" b="0">
+                <a:solidFill>
+                  <a:srgbClr val="333333"/>
+                </a:solidFill>
+                <a:latin typeface="Calibri"/>
+                <a:ea typeface="微軟正黑體"/>
+                <a:cs typeface="微軟正黑體"/>
+              </a:rPr>
+              <a:t>店舖人手少於更表要求時提示，並建議交叉訓練。</a:t>
+            </a:r>
+          </a:p>
+        </p:txBody>
+      </p:sp>
+      <p:sp>
+        <p:nvSpPr>
+          <p:cNvPr id="25" name="Rounded Rectangle 24"/>
+          <p:cNvSpPr/>
+          <p:nvPr/>
+        </p:nvSpPr>
+        <p:spPr>
+          <a:xfrm>
+            <a:off x="457200" y="5450400"/>
+            <a:ext cx="11277719" cy="360000"/>
+          </a:xfrm>
+          <a:prstGeom prst="roundRect">
+            <a:avLst>
+              <a:gd name="adj" fmla="val 10000"/>
+            </a:avLst>
+          </a:prstGeom>
+          <a:solidFill>
+            <a:srgbClr val="F2F6FA"/>
+          </a:solidFill>
+          <a:ln w="9525">
+            <a:solidFill>
+              <a:srgbClr val="D6DEE8"/>
+            </a:solidFill>
+          </a:ln>
+          <a:effectLst/>
+        </p:spPr>
+        <p:style>
+          <a:lnRef idx="1">
+            <a:schemeClr val="accent1"/>
+          </a:lnRef>
+          <a:fillRef idx="3">
+            <a:schemeClr val="accent1"/>
+          </a:fillRef>
+          <a:effectRef idx="2">
+            <a:schemeClr val="accent1"/>
+          </a:effectRef>
+          <a:fontRef idx="minor">
+            <a:schemeClr val="lt1"/>
+          </a:fontRef>
+        </p:style>
+        <p:txBody>
+          <a:bodyPr rtlCol="0" anchor="ctr"/>
+          <a:lstStyle/>
+          <a:p>
+            <a:pPr algn="ctr"/>
+          </a:p>
+        </p:txBody>
+      </p:sp>
+      <p:sp>
+        <p:nvSpPr>
+          <p:cNvPr id="26" name="TextBox 25"/>
+          <p:cNvSpPr txBox="1"/>
+          <p:nvPr/>
+        </p:nvSpPr>
+        <p:spPr>
+          <a:xfrm>
+            <a:off x="745200" y="5504400"/>
+            <a:ext cx="2520000" cy="251999"/>
+          </a:xfrm>
+          <a:prstGeom prst="rect">
+            <a:avLst/>
+          </a:prstGeom>
+          <a:noFill/>
+        </p:spPr>
+        <p:txBody>
+          <a:bodyPr wrap="square" lIns="0" rIns="0" tIns="0" bIns="0" anchor="ctr">
+            <a:spAutoFit/>
+          </a:bodyPr>
+          <a:lstStyle/>
+          <a:p>
+            <a:pPr algn="l">
+              <a:lnSpc>
+                <a:spcPct val="118000"/>
+              </a:lnSpc>
+              <a:spcBef>
+                <a:spcPts val="0"/>
+              </a:spcBef>
+              <a:spcAft>
+                <a:spcPts val="0"/>
+              </a:spcAft>
+            </a:pPr>
+            <a:r>
+              <a:rPr sz="1600" b="1">
+                <a:solidFill>
+                  <a:srgbClr val="1F497D"/>
+                </a:solidFill>
+                <a:latin typeface="Calibri"/>
+                <a:ea typeface="微軟正黑體"/>
+                <a:cs typeface="微軟正黑體"/>
+              </a:rPr>
+              <a:t>主控台新增兩個指標</a:t>
+            </a:r>
+          </a:p>
+        </p:txBody>
+      </p:sp>
+      <p:sp>
+        <p:nvSpPr>
+          <p:cNvPr id="27" name="TextBox 26"/>
+          <p:cNvSpPr txBox="1"/>
+          <p:nvPr/>
+        </p:nvSpPr>
+        <p:spPr>
+          <a:xfrm>
+            <a:off x="3553199" y="5504400"/>
+            <a:ext cx="7893719" cy="251999"/>
+          </a:xfrm>
+          <a:prstGeom prst="rect">
+            <a:avLst/>
+          </a:prstGeom>
+          <a:noFill/>
+        </p:spPr>
+        <p:txBody>
+          <a:bodyPr wrap="square" lIns="0" rIns="0" tIns="0" bIns="0" anchor="ctr">
+            <a:spAutoFit/>
+          </a:bodyPr>
+          <a:lstStyle/>
+          <a:p>
+            <a:pPr algn="l">
+              <a:lnSpc>
+                <a:spcPct val="125000"/>
+              </a:lnSpc>
+              <a:spcBef>
+                <a:spcPts val="0"/>
+              </a:spcBef>
+              <a:spcAft>
+                <a:spcPts val="0"/>
+              </a:spcAft>
+            </a:pPr>
+            <a:r>
+              <a:rPr sz="1400" b="0">
+                <a:solidFill>
+                  <a:srgbClr val="333333"/>
+                </a:solidFill>
+                <a:latin typeface="Calibri"/>
+                <a:ea typeface="微軟正黑體"/>
+                <a:cs typeface="微軟正黑體"/>
+              </a:rPr>
+              <a:t>服務健康度，以及人效配比（每員工小時服務人次）。</a:t>
+            </a:r>
+          </a:p>
+        </p:txBody>
+      </p:sp>
+      <p:sp>
+        <p:nvSpPr>
+          <p:cNvPr id="28" name="TextBox 27"/>
+          <p:cNvSpPr txBox="1"/>
+          <p:nvPr/>
+        </p:nvSpPr>
+        <p:spPr>
+          <a:xfrm>
+            <a:off x="457200" y="5918400"/>
+            <a:ext cx="11277719" cy="324000"/>
+          </a:xfrm>
+          <a:prstGeom prst="rect">
+            <a:avLst/>
+          </a:prstGeom>
+          <a:noFill/>
+        </p:spPr>
+        <p:txBody>
+          <a:bodyPr wrap="square" lIns="0" rIns="0" tIns="0" bIns="0">
+            <a:spAutoFit/>
+          </a:bodyPr>
+          <a:lstStyle/>
+          <a:p>
+            <a:pPr algn="l">
+              <a:lnSpc>
+                <a:spcPct val="118000"/>
+              </a:lnSpc>
+              <a:spcBef>
+                <a:spcPts val="0"/>
+              </a:spcBef>
+              <a:spcAft>
+                <a:spcPts val="0"/>
+              </a:spcAft>
+            </a:pPr>
+            <a:r>
+              <a:rPr sz="1500" b="1">
+                <a:solidFill>
+                  <a:srgbClr val="1F497D"/>
+                </a:solidFill>
+                <a:latin typeface="Calibri"/>
+                <a:ea typeface="微軟正黑體"/>
+                <a:cs typeface="微軟正黑體"/>
+              </a:rPr>
+              <a:t>試點階段以人流與更表推算，並非影像偵測；本頁不提供畫面。</a:t>
+            </a:r>
+          </a:p>
+        </p:txBody>
+      </p:sp>
+      <p:sp>
+        <p:nvSpPr>
+          <p:cNvPr id="29" name="TextBox 28"/>
+          <p:cNvSpPr txBox="1"/>
+          <p:nvPr/>
+        </p:nvSpPr>
+        <p:spPr>
+          <a:xfrm>
+            <a:off x="457200" y="6357600"/>
+            <a:ext cx="2134800" cy="363600"/>
+          </a:xfrm>
+          <a:prstGeom prst="rect">
+            <a:avLst/>
+          </a:prstGeom>
+          <a:noFill/>
+        </p:spPr>
+        <p:txBody>
+          <a:bodyPr wrap="square" lIns="0" rIns="0" tIns="0" bIns="0" anchor="ctr">
+            <a:spAutoFit/>
+          </a:bodyPr>
+          <a:lstStyle/>
           <a:p/>
         </p:txBody>
       </p:sp>
       <p:sp>
         <p:nvSpPr>
-          <p:cNvPr id="19" name="TextBox 18"/>
+          <p:cNvPr id="30" name="TextBox 29"/>
           <p:cNvSpPr txBox="1"/>
           <p:nvPr/>
         </p:nvSpPr>
@@ -9470,7 +10181,7 @@
       </p:sp>
       <p:sp>
         <p:nvSpPr>
-          <p:cNvPr id="20" name="TextBox 19"/>
+          <p:cNvPr id="31" name="TextBox 30"/>
           <p:cNvSpPr txBox="1"/>
           <p:nvPr/>
         </p:nvSpPr>
@@ -9563,124 +10274,34 @@
                 <a:ea typeface="微軟正黑體"/>
                 <a:cs typeface="微軟正黑體"/>
               </a:rPr>
-              <a:t>試點如何開始</a:t>
-            </a:r>
-          </a:p>
-        </p:txBody>
-      </p:sp>
-      <p:sp>
-        <p:nvSpPr>
-          <p:cNvPr id="3" name="TextBox 2"/>
-          <p:cNvSpPr txBox="1"/>
-          <p:nvPr/>
-        </p:nvSpPr>
-        <p:spPr>
-          <a:xfrm>
-            <a:off x="457200" y="1652400"/>
-            <a:ext cx="4320000" cy="774000"/>
-          </a:xfrm>
-          <a:prstGeom prst="rect">
-            <a:avLst/>
-          </a:prstGeom>
-          <a:noFill/>
-        </p:spPr>
-        <p:txBody>
-          <a:bodyPr wrap="square" lIns="0" rIns="0" tIns="0" bIns="0" anchor="ctr">
-            <a:spAutoFit/>
-          </a:bodyPr>
-          <a:lstStyle/>
-          <a:p>
-            <a:pPr algn="l">
-              <a:lnSpc>
-                <a:spcPct val="118000"/>
-              </a:lnSpc>
-              <a:spcBef>
-                <a:spcPts val="0"/>
-              </a:spcBef>
-              <a:spcAft>
-                <a:spcPts val="0"/>
-              </a:spcAft>
-            </a:pPr>
-            <a:r>
-              <a:rPr sz="1800" b="1">
-                <a:solidFill>
-                  <a:srgbClr val="1F497D"/>
-                </a:solidFill>
-                <a:latin typeface="Calibri"/>
-                <a:ea typeface="微軟正黑體"/>
-                <a:cs typeface="微軟正黑體"/>
-              </a:rPr>
-              <a:t>第一步｜選定門店</a:t>
-            </a:r>
-          </a:p>
-        </p:txBody>
-      </p:sp>
-      <p:sp>
-        <p:nvSpPr>
-          <p:cNvPr id="4" name="TextBox 3"/>
-          <p:cNvSpPr txBox="1"/>
-          <p:nvPr/>
-        </p:nvSpPr>
-        <p:spPr>
-          <a:xfrm>
-            <a:off x="4993200" y="1652400"/>
-            <a:ext cx="6741719" cy="774000"/>
-          </a:xfrm>
-          <a:prstGeom prst="rect">
-            <a:avLst/>
-          </a:prstGeom>
-          <a:noFill/>
-        </p:spPr>
-        <p:txBody>
-          <a:bodyPr wrap="square" lIns="0" rIns="0" tIns="0" bIns="0" anchor="ctr">
-            <a:spAutoFit/>
-          </a:bodyPr>
-          <a:lstStyle/>
-          <a:p>
-            <a:pPr algn="l">
-              <a:lnSpc>
-                <a:spcPct val="130000"/>
-              </a:lnSpc>
-              <a:spcBef>
-                <a:spcPts val="0"/>
-              </a:spcBef>
-              <a:spcAft>
-                <a:spcPts val="0"/>
-              </a:spcAft>
-            </a:pPr>
-            <a:r>
-              <a:rPr sz="1500" b="0">
-                <a:solidFill>
-                  <a:srgbClr val="333333"/>
-                </a:solidFill>
-                <a:latin typeface="Calibri"/>
-                <a:ea typeface="微軟正黑體"/>
-                <a:cs typeface="微軟正黑體"/>
-              </a:rPr>
-              <a:t>選定一店，準備平面圖與現有鏡頭評估。</a:t>
-            </a:r>
-          </a:p>
-        </p:txBody>
-      </p:sp>
-      <p:sp>
-        <p:nvSpPr>
-          <p:cNvPr id="5" name="Rectangle 4"/>
+              <a:t>HKIT 實施服務</a:t>
+            </a:r>
+          </a:p>
+        </p:txBody>
+      </p:sp>
+      <p:sp>
+        <p:nvSpPr>
+          <p:cNvPr id="3" name="Rounded Rectangle 2"/>
           <p:cNvSpPr/>
           <p:nvPr/>
         </p:nvSpPr>
         <p:spPr>
           <a:xfrm>
-            <a:off x="457200" y="2521800"/>
-            <a:ext cx="11277719" cy="7200"/>
-          </a:xfrm>
-          <a:prstGeom prst="rect">
-            <a:avLst/>
+            <a:off x="457200" y="1616400"/>
+            <a:ext cx="11277719" cy="774719"/>
+          </a:xfrm>
+          <a:prstGeom prst="roundRect">
+            <a:avLst>
+              <a:gd name="adj" fmla="val 10000"/>
+            </a:avLst>
           </a:prstGeom>
           <a:solidFill>
-            <a:srgbClr val="D6DEE8"/>
+            <a:srgbClr val="F2F6FA"/>
           </a:solidFill>
-          <a:ln>
-            <a:noFill/>
+          <a:ln w="9525">
+            <a:solidFill>
+              <a:srgbClr val="D6DEE8"/>
+            </a:solidFill>
           </a:ln>
           <a:effectLst/>
         </p:spPr>
@@ -9708,14 +10329,14 @@
       </p:sp>
       <p:sp>
         <p:nvSpPr>
-          <p:cNvPr id="6" name="TextBox 5"/>
+          <p:cNvPr id="4" name="TextBox 3"/>
           <p:cNvSpPr txBox="1"/>
           <p:nvPr/>
         </p:nvSpPr>
         <p:spPr>
           <a:xfrm>
-            <a:off x="457200" y="2624400"/>
-            <a:ext cx="4320000" cy="774000"/>
+            <a:off x="745200" y="1695600"/>
+            <a:ext cx="2736000" cy="630719"/>
           </a:xfrm>
           <a:prstGeom prst="rect">
             <a:avLst/>
@@ -9740,7 +10361,7 @@
               </a:spcAft>
             </a:pPr>
             <a:r>
-              <a:rPr sz="1800" b="1">
+              <a:rPr sz="1700" b="1">
                 <a:solidFill>
                   <a:srgbClr val="1F497D"/>
                 </a:solidFill>
@@ -9748,21 +10369,21 @@
                 <a:ea typeface="微軟正黑體"/>
                 <a:cs typeface="微軟正黑體"/>
               </a:rPr>
-              <a:t>第二步｜訂定規則</a:t>
-            </a:r>
-          </a:p>
-        </p:txBody>
-      </p:sp>
-      <p:sp>
-        <p:nvSpPr>
-          <p:cNvPr id="7" name="TextBox 6"/>
+              <a:t>現場標定</a:t>
+            </a:r>
+          </a:p>
+        </p:txBody>
+      </p:sp>
+      <p:sp>
+        <p:nvSpPr>
+          <p:cNvPr id="5" name="TextBox 4"/>
           <p:cNvSpPr txBox="1"/>
           <p:nvPr/>
         </p:nvSpPr>
         <p:spPr>
           <a:xfrm>
-            <a:off x="4993200" y="2624400"/>
-            <a:ext cx="6741719" cy="774000"/>
+            <a:off x="3553199" y="1695600"/>
+            <a:ext cx="7893719" cy="630719"/>
           </a:xfrm>
           <a:prstGeom prst="rect">
             <a:avLst/>
@@ -9777,7 +10398,7 @@
           <a:p>
             <a:pPr algn="l">
               <a:lnSpc>
-                <a:spcPct val="130000"/>
+                <a:spcPct val="125000"/>
               </a:lnSpc>
               <a:spcBef>
                 <a:spcPts val="0"/>
@@ -9795,30 +10416,34 @@
                 <a:ea typeface="微軟正黑體"/>
                 <a:cs typeface="微軟正黑體"/>
               </a:rPr>
-              <a:t>確立服務缺口門檻與店長簽收流程。</a:t>
-            </a:r>
-          </a:p>
-        </p:txBody>
-      </p:sp>
-      <p:sp>
-        <p:nvSpPr>
-          <p:cNvPr id="8" name="Rectangle 7"/>
+              <a:t>攝像位置與區域界線勘定，確保計數與停留判定準確。</a:t>
+            </a:r>
+          </a:p>
+        </p:txBody>
+      </p:sp>
+      <p:sp>
+        <p:nvSpPr>
+          <p:cNvPr id="6" name="Rounded Rectangle 5"/>
           <p:cNvSpPr/>
           <p:nvPr/>
         </p:nvSpPr>
         <p:spPr>
           <a:xfrm>
-            <a:off x="457200" y="3493800"/>
-            <a:ext cx="11277719" cy="7200"/>
-          </a:xfrm>
-          <a:prstGeom prst="rect">
-            <a:avLst/>
+            <a:off x="457200" y="2553120"/>
+            <a:ext cx="11277719" cy="774719"/>
+          </a:xfrm>
+          <a:prstGeom prst="roundRect">
+            <a:avLst>
+              <a:gd name="adj" fmla="val 10000"/>
+            </a:avLst>
           </a:prstGeom>
           <a:solidFill>
-            <a:srgbClr val="D6DEE8"/>
+            <a:srgbClr val="FFFFFF"/>
           </a:solidFill>
-          <a:ln>
-            <a:noFill/>
+          <a:ln w="9525">
+            <a:solidFill>
+              <a:srgbClr val="D6DEE8"/>
+            </a:solidFill>
           </a:ln>
           <a:effectLst/>
         </p:spPr>
@@ -9846,14 +10471,14 @@
       </p:sp>
       <p:sp>
         <p:nvSpPr>
-          <p:cNvPr id="9" name="TextBox 8"/>
+          <p:cNvPr id="7" name="TextBox 6"/>
           <p:cNvSpPr txBox="1"/>
           <p:nvPr/>
         </p:nvSpPr>
         <p:spPr>
           <a:xfrm>
-            <a:off x="457200" y="3596400"/>
-            <a:ext cx="4320000" cy="774000"/>
+            <a:off x="745200" y="2632320"/>
+            <a:ext cx="2736000" cy="630719"/>
           </a:xfrm>
           <a:prstGeom prst="rect">
             <a:avLst/>
@@ -9878,7 +10503,7 @@
               </a:spcAft>
             </a:pPr>
             <a:r>
-              <a:rPr sz="1800" b="1">
+              <a:rPr sz="1700" b="1">
                 <a:solidFill>
                   <a:srgbClr val="1F497D"/>
                 </a:solidFill>
@@ -9886,21 +10511,21 @@
                 <a:ea typeface="微軟正黑體"/>
                 <a:cs typeface="微軟正黑體"/>
               </a:rPr>
-              <a:t>第三步｜排班對接深度</a:t>
-            </a:r>
-          </a:p>
-        </p:txBody>
-      </p:sp>
-      <p:sp>
-        <p:nvSpPr>
-          <p:cNvPr id="10" name="TextBox 9"/>
+              <a:t>平台對接</a:t>
+            </a:r>
+          </a:p>
+        </p:txBody>
+      </p:sp>
+      <p:sp>
+        <p:nvSpPr>
+          <p:cNvPr id="8" name="TextBox 7"/>
           <p:cNvSpPr txBox="1"/>
           <p:nvPr/>
         </p:nvSpPr>
         <p:spPr>
           <a:xfrm>
-            <a:off x="4993200" y="3596400"/>
-            <a:ext cx="6741719" cy="774000"/>
+            <a:off x="3553199" y="2632320"/>
+            <a:ext cx="7893719" cy="630719"/>
           </a:xfrm>
           <a:prstGeom prst="rect">
             <a:avLst/>
@@ -9915,7 +10540,7 @@
           <a:p>
             <a:pPr algn="l">
               <a:lnSpc>
-                <a:spcPct val="130000"/>
+                <a:spcPct val="125000"/>
               </a:lnSpc>
               <a:spcBef>
                 <a:spcPts val="0"/>
@@ -9933,30 +10558,34 @@
                 <a:ea typeface="微軟正黑體"/>
                 <a:cs typeface="微軟正黑體"/>
               </a:rPr>
-              <a:t>先提供建議，或需要寫回既有排班系統，兩者皆可商議。</a:t>
-            </a:r>
-          </a:p>
-        </p:txBody>
-      </p:sp>
-      <p:sp>
-        <p:nvSpPr>
-          <p:cNvPr id="11" name="Rectangle 10"/>
+              <a:t>一見事件接入 IFMP，設定規則閾值與告警條件。</a:t>
+            </a:r>
+          </a:p>
+        </p:txBody>
+      </p:sp>
+      <p:sp>
+        <p:nvSpPr>
+          <p:cNvPr id="9" name="Rounded Rectangle 8"/>
           <p:cNvSpPr/>
           <p:nvPr/>
         </p:nvSpPr>
         <p:spPr>
           <a:xfrm>
-            <a:off x="457200" y="4465800"/>
-            <a:ext cx="11277719" cy="7200"/>
-          </a:xfrm>
-          <a:prstGeom prst="rect">
-            <a:avLst/>
+            <a:off x="457200" y="3489839"/>
+            <a:ext cx="11277719" cy="774719"/>
+          </a:xfrm>
+          <a:prstGeom prst="roundRect">
+            <a:avLst>
+              <a:gd name="adj" fmla="val 10000"/>
+            </a:avLst>
           </a:prstGeom>
           <a:solidFill>
-            <a:srgbClr val="D6DEE8"/>
+            <a:srgbClr val="F2F6FA"/>
           </a:solidFill>
-          <a:ln>
-            <a:noFill/>
+          <a:ln w="9525">
+            <a:solidFill>
+              <a:srgbClr val="D6DEE8"/>
+            </a:solidFill>
           </a:ln>
           <a:effectLst/>
         </p:spPr>
@@ -9984,14 +10613,14 @@
       </p:sp>
       <p:sp>
         <p:nvSpPr>
-          <p:cNvPr id="12" name="TextBox 11"/>
+          <p:cNvPr id="10" name="TextBox 9"/>
           <p:cNvSpPr txBox="1"/>
           <p:nvPr/>
         </p:nvSpPr>
         <p:spPr>
           <a:xfrm>
-            <a:off x="457200" y="4568400"/>
-            <a:ext cx="4320000" cy="774000"/>
+            <a:off x="745200" y="3569040"/>
+            <a:ext cx="2736000" cy="630719"/>
           </a:xfrm>
           <a:prstGeom prst="rect">
             <a:avLst/>
@@ -10016,7 +10645,7 @@
               </a:spcAft>
             </a:pPr>
             <a:r>
-              <a:rPr sz="1800" b="1">
+              <a:rPr sz="1700" b="1">
                 <a:solidFill>
                   <a:srgbClr val="1F497D"/>
                 </a:solidFill>
@@ -10024,21 +10653,21 @@
                 <a:ea typeface="微軟正黑體"/>
                 <a:cs typeface="微軟正黑體"/>
               </a:rPr>
-              <a:t>第四步｜換入真實數據</a:t>
-            </a:r>
-          </a:p>
-        </p:txBody>
-      </p:sp>
-      <p:sp>
-        <p:nvSpPr>
-          <p:cNvPr id="13" name="TextBox 12"/>
+              <a:t>平面圖與區域設定</a:t>
+            </a:r>
+          </a:p>
+        </p:txBody>
+      </p:sp>
+      <p:sp>
+        <p:nvSpPr>
+          <p:cNvPr id="11" name="TextBox 10"/>
           <p:cNvSpPr txBox="1"/>
           <p:nvPr/>
         </p:nvSpPr>
         <p:spPr>
           <a:xfrm>
-            <a:off x="4993200" y="4568400"/>
-            <a:ext cx="6741719" cy="774000"/>
+            <a:off x="3553199" y="3569040"/>
+            <a:ext cx="7893719" cy="630719"/>
           </a:xfrm>
           <a:prstGeom prst="rect">
             <a:avLst/>
@@ -10053,7 +10682,7 @@
           <a:p>
             <a:pPr algn="l">
               <a:lnSpc>
-                <a:spcPct val="130000"/>
+                <a:spcPct val="125000"/>
               </a:lnSpc>
               <a:spcBef>
                 <a:spcPts val="0"/>
@@ -10071,21 +10700,69 @@
                 <a:ea typeface="微軟正黑體"/>
                 <a:cs typeface="微軟正黑體"/>
               </a:rPr>
-              <a:t>試點期沿用同一套介面，以真實數據取代樣本資料。</a:t>
-            </a:r>
-          </a:p>
-        </p:txBody>
-      </p:sp>
-      <p:sp>
-        <p:nvSpPr>
-          <p:cNvPr id="14" name="TextBox 13"/>
+              <a:t>依真實門店平面圖完成區域定義，介面沿用現有結構。</a:t>
+            </a:r>
+          </a:p>
+        </p:txBody>
+      </p:sp>
+      <p:sp>
+        <p:nvSpPr>
+          <p:cNvPr id="12" name="Rounded Rectangle 11"/>
+          <p:cNvSpPr/>
+          <p:nvPr/>
+        </p:nvSpPr>
+        <p:spPr>
+          <a:xfrm>
+            <a:off x="457200" y="4426560"/>
+            <a:ext cx="11277719" cy="774719"/>
+          </a:xfrm>
+          <a:prstGeom prst="roundRect">
+            <a:avLst>
+              <a:gd name="adj" fmla="val 10000"/>
+            </a:avLst>
+          </a:prstGeom>
+          <a:solidFill>
+            <a:srgbClr val="FFFFFF"/>
+          </a:solidFill>
+          <a:ln w="9525">
+            <a:solidFill>
+              <a:srgbClr val="D6DEE8"/>
+            </a:solidFill>
+          </a:ln>
+          <a:effectLst/>
+        </p:spPr>
+        <p:style>
+          <a:lnRef idx="1">
+            <a:schemeClr val="accent1"/>
+          </a:lnRef>
+          <a:fillRef idx="3">
+            <a:schemeClr val="accent1"/>
+          </a:fillRef>
+          <a:effectRef idx="2">
+            <a:schemeClr val="accent1"/>
+          </a:effectRef>
+          <a:fontRef idx="minor">
+            <a:schemeClr val="lt1"/>
+          </a:fontRef>
+        </p:style>
+        <p:txBody>
+          <a:bodyPr rtlCol="0" anchor="ctr"/>
+          <a:lstStyle/>
+          <a:p>
+            <a:pPr algn="ctr"/>
+          </a:p>
+        </p:txBody>
+      </p:sp>
+      <p:sp>
+        <p:nvSpPr>
+          <p:cNvPr id="13" name="TextBox 12"/>
           <p:cNvSpPr txBox="1"/>
           <p:nvPr/>
         </p:nvSpPr>
         <p:spPr>
           <a:xfrm>
-            <a:off x="457200" y="5576400"/>
-            <a:ext cx="11277719" cy="324000"/>
+            <a:off x="745200" y="4505760"/>
+            <a:ext cx="2736000" cy="630719"/>
           </a:xfrm>
           <a:prstGeom prst="rect">
             <a:avLst/>
@@ -10093,7 +10770,7 @@
           <a:noFill/>
         </p:spPr>
         <p:txBody>
-          <a:bodyPr wrap="square" lIns="0" rIns="0" tIns="0" bIns="0">
+          <a:bodyPr wrap="square" lIns="0" rIns="0" tIns="0" bIns="0" anchor="ctr">
             <a:spAutoFit/>
           </a:bodyPr>
           <a:lstStyle/>
@@ -10110,7 +10787,7 @@
               </a:spcAft>
             </a:pPr>
             <a:r>
-              <a:rPr sz="1500" b="1">
+              <a:rPr sz="1700" b="1">
                 <a:solidFill>
                   <a:srgbClr val="1F497D"/>
                 </a:solidFill>
@@ -10118,21 +10795,21 @@
                 <a:ea typeface="微軟正黑體"/>
                 <a:cs typeface="微軟正黑體"/>
               </a:rPr>
-              <a:t>請貴司考慮決定：試點門店與時間窗口、對接窗口（營運與資訊）、是否安排操作工作坊。</a:t>
-            </a:r>
-          </a:p>
-        </p:txBody>
-      </p:sp>
-      <p:sp>
-        <p:nvSpPr>
-          <p:cNvPr id="15" name="TextBox 14"/>
+              <a:t>人員識別基礎</a:t>
+            </a:r>
+          </a:p>
+        </p:txBody>
+      </p:sp>
+      <p:sp>
+        <p:nvSpPr>
+          <p:cNvPr id="14" name="TextBox 13"/>
           <p:cNvSpPr txBox="1"/>
           <p:nvPr/>
         </p:nvSpPr>
         <p:spPr>
           <a:xfrm>
-            <a:off x="457200" y="6357600"/>
-            <a:ext cx="2134800" cy="363600"/>
+            <a:off x="3553199" y="4505760"/>
+            <a:ext cx="7893719" cy="630719"/>
           </a:xfrm>
           <a:prstGeom prst="rect">
             <a:avLst/>
@@ -10144,12 +10821,201 @@
             <a:spAutoFit/>
           </a:bodyPr>
           <a:lstStyle/>
+          <a:p>
+            <a:pPr algn="l">
+              <a:lnSpc>
+                <a:spcPct val="125000"/>
+              </a:lnSpc>
+              <a:spcBef>
+                <a:spcPts val="0"/>
+              </a:spcBef>
+              <a:spcAft>
+                <a:spcPts val="0"/>
+              </a:spcAft>
+            </a:pPr>
+            <a:r>
+              <a:rPr sz="1500" b="0">
+                <a:solidFill>
+                  <a:srgbClr val="333333"/>
+                </a:solidFill>
+                <a:latin typeface="Calibri"/>
+                <a:ea typeface="微軟正黑體"/>
+                <a:cs typeface="微軟正黑體"/>
+              </a:rPr>
+              <a:t>建立工服與排班對照基礎，供人員分類使用。</a:t>
+            </a:r>
+          </a:p>
+        </p:txBody>
+      </p:sp>
+      <p:sp>
+        <p:nvSpPr>
+          <p:cNvPr id="15" name="Rounded Rectangle 14"/>
+          <p:cNvSpPr/>
+          <p:nvPr/>
+        </p:nvSpPr>
+        <p:spPr>
+          <a:xfrm>
+            <a:off x="457200" y="5363280"/>
+            <a:ext cx="11277719" cy="774719"/>
+          </a:xfrm>
+          <a:prstGeom prst="roundRect">
+            <a:avLst>
+              <a:gd name="adj" fmla="val 10000"/>
+            </a:avLst>
+          </a:prstGeom>
+          <a:solidFill>
+            <a:srgbClr val="F2F6FA"/>
+          </a:solidFill>
+          <a:ln w="9525">
+            <a:solidFill>
+              <a:srgbClr val="D6DEE8"/>
+            </a:solidFill>
+          </a:ln>
+          <a:effectLst/>
+        </p:spPr>
+        <p:style>
+          <a:lnRef idx="1">
+            <a:schemeClr val="accent1"/>
+          </a:lnRef>
+          <a:fillRef idx="3">
+            <a:schemeClr val="accent1"/>
+          </a:fillRef>
+          <a:effectRef idx="2">
+            <a:schemeClr val="accent1"/>
+          </a:effectRef>
+          <a:fontRef idx="minor">
+            <a:schemeClr val="lt1"/>
+          </a:fontRef>
+        </p:style>
+        <p:txBody>
+          <a:bodyPr rtlCol="0" anchor="ctr"/>
+          <a:lstStyle/>
+          <a:p>
+            <a:pPr algn="ctr"/>
+          </a:p>
+        </p:txBody>
+      </p:sp>
+      <p:sp>
+        <p:nvSpPr>
+          <p:cNvPr id="16" name="TextBox 15"/>
+          <p:cNvSpPr txBox="1"/>
+          <p:nvPr/>
+        </p:nvSpPr>
+        <p:spPr>
+          <a:xfrm>
+            <a:off x="745200" y="5442480"/>
+            <a:ext cx="2736000" cy="630719"/>
+          </a:xfrm>
+          <a:prstGeom prst="rect">
+            <a:avLst/>
+          </a:prstGeom>
+          <a:noFill/>
+        </p:spPr>
+        <p:txBody>
+          <a:bodyPr wrap="square" lIns="0" rIns="0" tIns="0" bIns="0" anchor="ctr">
+            <a:spAutoFit/>
+          </a:bodyPr>
+          <a:lstStyle/>
+          <a:p>
+            <a:pPr algn="l">
+              <a:lnSpc>
+                <a:spcPct val="118000"/>
+              </a:lnSpc>
+              <a:spcBef>
+                <a:spcPts val="0"/>
+              </a:spcBef>
+              <a:spcAft>
+                <a:spcPts val="0"/>
+              </a:spcAft>
+            </a:pPr>
+            <a:r>
+              <a:rPr sz="1700" b="1">
+                <a:solidFill>
+                  <a:srgbClr val="1F497D"/>
+                </a:solidFill>
+                <a:latin typeface="Calibri"/>
+                <a:ea typeface="微軟正黑體"/>
+                <a:cs typeface="微軟正黑體"/>
+              </a:rPr>
+              <a:t>培訓與支援</a:t>
+            </a:r>
+          </a:p>
+        </p:txBody>
+      </p:sp>
+      <p:sp>
+        <p:nvSpPr>
+          <p:cNvPr id="17" name="TextBox 16"/>
+          <p:cNvSpPr txBox="1"/>
+          <p:nvPr/>
+        </p:nvSpPr>
+        <p:spPr>
+          <a:xfrm>
+            <a:off x="3553199" y="5442480"/>
+            <a:ext cx="7893719" cy="630719"/>
+          </a:xfrm>
+          <a:prstGeom prst="rect">
+            <a:avLst/>
+          </a:prstGeom>
+          <a:noFill/>
+        </p:spPr>
+        <p:txBody>
+          <a:bodyPr wrap="square" lIns="0" rIns="0" tIns="0" bIns="0" anchor="ctr">
+            <a:spAutoFit/>
+          </a:bodyPr>
+          <a:lstStyle/>
+          <a:p>
+            <a:pPr algn="l">
+              <a:lnSpc>
+                <a:spcPct val="125000"/>
+              </a:lnSpc>
+              <a:spcBef>
+                <a:spcPts val="0"/>
+              </a:spcBef>
+              <a:spcAft>
+                <a:spcPts val="0"/>
+              </a:spcAft>
+            </a:pPr>
+            <a:r>
+              <a:rPr sz="1500" b="0">
+                <a:solidFill>
+                  <a:srgbClr val="333333"/>
+                </a:solidFill>
+                <a:latin typeface="Calibri"/>
+                <a:ea typeface="微軟正黑體"/>
+                <a:cs typeface="微軟正黑體"/>
+              </a:rPr>
+              <a:t>店長與營運培訓、週會複盤方法、上線後支援安排。</a:t>
+            </a:r>
+          </a:p>
+        </p:txBody>
+      </p:sp>
+      <p:sp>
+        <p:nvSpPr>
+          <p:cNvPr id="18" name="TextBox 17"/>
+          <p:cNvSpPr txBox="1"/>
+          <p:nvPr/>
+        </p:nvSpPr>
+        <p:spPr>
+          <a:xfrm>
+            <a:off x="457200" y="6357600"/>
+            <a:ext cx="2134800" cy="363600"/>
+          </a:xfrm>
+          <a:prstGeom prst="rect">
+            <a:avLst/>
+          </a:prstGeom>
+          <a:noFill/>
+        </p:spPr>
+        <p:txBody>
+          <a:bodyPr wrap="square" lIns="0" rIns="0" tIns="0" bIns="0" anchor="ctr">
+            <a:spAutoFit/>
+          </a:bodyPr>
+          <a:lstStyle/>
           <a:p/>
         </p:txBody>
       </p:sp>
       <p:sp>
         <p:nvSpPr>
-          <p:cNvPr id="16" name="TextBox 15"/>
+          <p:cNvPr id="19" name="TextBox 18"/>
           <p:cNvSpPr txBox="1"/>
           <p:nvPr/>
         </p:nvSpPr>
@@ -10196,7 +11062,7 @@
       </p:sp>
       <p:sp>
         <p:nvSpPr>
-          <p:cNvPr id="17" name="TextBox 16"/>
+          <p:cNvPr id="20" name="TextBox 19"/>
           <p:cNvSpPr txBox="1"/>
           <p:nvPr/>
         </p:nvSpPr>
@@ -10266,16 +11132,22 @@
             <a:spLocks noGrp="1"/>
           </p:cNvSpPr>
           <p:nvPr>
-            <p:ph type="ctrTitle"/>
+            <p:ph type="title"/>
           </p:nvPr>
         </p:nvSpPr>
-        <p:spPr/>
-        <p:txBody>
-          <a:bodyPr/>
-          <a:lstStyle/>
-          <a:p>
-            <a:r>
-              <a:rPr sz="4400" b="1">
+        <p:spPr>
+          <a:xfrm>
+            <a:off x="457200" y="273600"/>
+            <a:ext cx="10942919" cy="1141200"/>
+          </a:xfrm>
+        </p:spPr>
+        <p:txBody>
+          <a:bodyPr wrap="square" anchor="ctr"/>
+          <a:lstStyle/>
+          <a:p>
+            <a:pPr algn="l"/>
+            <a:r>
+              <a:rPr sz="3000" b="1">
                 <a:solidFill>
                   <a:srgbClr val="1F497D"/>
                 </a:solidFill>
@@ -10283,24 +11155,31 @@
                 <a:ea typeface="微軟正黑體"/>
                 <a:cs typeface="微軟正黑體"/>
               </a:rPr>
-              <a:t>多謝</a:t>
-            </a:r>
-          </a:p>
-        </p:txBody>
-      </p:sp>
-      <p:sp>
-        <p:nvSpPr>
-          <p:cNvPr id="3" name="Subtitle 2"/>
-          <p:cNvSpPr>
-            <a:spLocks noGrp="1"/>
-          </p:cNvSpPr>
-          <p:nvPr>
-            <p:ph type="subTitle" idx="1"/>
-          </p:nvPr>
-        </p:nvSpPr>
-        <p:spPr/>
-        <p:txBody>
-          <a:bodyPr wrap="square"/>
+              <a:t>試點如何開始</a:t>
+            </a:r>
+          </a:p>
+        </p:txBody>
+      </p:sp>
+      <p:sp>
+        <p:nvSpPr>
+          <p:cNvPr id="3" name="TextBox 2"/>
+          <p:cNvSpPr txBox="1"/>
+          <p:nvPr/>
+        </p:nvSpPr>
+        <p:spPr>
+          <a:xfrm>
+            <a:off x="457200" y="1652400"/>
+            <a:ext cx="4320000" cy="774000"/>
+          </a:xfrm>
+          <a:prstGeom prst="rect">
+            <a:avLst/>
+          </a:prstGeom>
+          <a:noFill/>
+        </p:spPr>
+        <p:txBody>
+          <a:bodyPr wrap="square" lIns="0" rIns="0" tIns="0" bIns="0" anchor="ctr">
+            <a:spAutoFit/>
+          </a:bodyPr>
           <a:lstStyle/>
           <a:p>
             <a:pPr algn="l">
@@ -10311,11 +11190,11 @@
                 <a:spcPts val="0"/>
               </a:spcBef>
               <a:spcAft>
-                <a:spcPts val="1800"/>
+                <a:spcPts val="0"/>
               </a:spcAft>
             </a:pPr>
             <a:r>
-              <a:rPr sz="2600" b="1">
+              <a:rPr sz="1800" b="1">
                 <a:solidFill>
                   <a:srgbClr val="1F497D"/>
                 </a:solidFill>
@@ -10323,9 +11202,123 @@
                 <a:ea typeface="微軟正黑體"/>
                 <a:cs typeface="微軟正黑體"/>
               </a:rPr>
-              <a:t>HKIT 智域 × 百度一見</a:t>
-            </a:r>
-          </a:p>
+              <a:t>第一步｜選定門店</a:t>
+            </a:r>
+          </a:p>
+        </p:txBody>
+      </p:sp>
+      <p:sp>
+        <p:nvSpPr>
+          <p:cNvPr id="4" name="TextBox 3"/>
+          <p:cNvSpPr txBox="1"/>
+          <p:nvPr/>
+        </p:nvSpPr>
+        <p:spPr>
+          <a:xfrm>
+            <a:off x="4993200" y="1652400"/>
+            <a:ext cx="6741719" cy="774000"/>
+          </a:xfrm>
+          <a:prstGeom prst="rect">
+            <a:avLst/>
+          </a:prstGeom>
+          <a:noFill/>
+        </p:spPr>
+        <p:txBody>
+          <a:bodyPr wrap="square" lIns="0" rIns="0" tIns="0" bIns="0" anchor="ctr">
+            <a:spAutoFit/>
+          </a:bodyPr>
+          <a:lstStyle/>
+          <a:p>
+            <a:pPr algn="l">
+              <a:lnSpc>
+                <a:spcPct val="130000"/>
+              </a:lnSpc>
+              <a:spcBef>
+                <a:spcPts val="0"/>
+              </a:spcBef>
+              <a:spcAft>
+                <a:spcPts val="0"/>
+              </a:spcAft>
+            </a:pPr>
+            <a:r>
+              <a:rPr sz="1500" b="0">
+                <a:solidFill>
+                  <a:srgbClr val="333333"/>
+                </a:solidFill>
+                <a:latin typeface="Calibri"/>
+                <a:ea typeface="微軟正黑體"/>
+                <a:cs typeface="微軟正黑體"/>
+              </a:rPr>
+              <a:t>選定一店，準備平面圖與現有鏡頭評估。</a:t>
+            </a:r>
+          </a:p>
+        </p:txBody>
+      </p:sp>
+      <p:sp>
+        <p:nvSpPr>
+          <p:cNvPr id="5" name="Rectangle 4"/>
+          <p:cNvSpPr/>
+          <p:nvPr/>
+        </p:nvSpPr>
+        <p:spPr>
+          <a:xfrm>
+            <a:off x="457200" y="2521800"/>
+            <a:ext cx="11277719" cy="7200"/>
+          </a:xfrm>
+          <a:prstGeom prst="rect">
+            <a:avLst/>
+          </a:prstGeom>
+          <a:solidFill>
+            <a:srgbClr val="D6DEE8"/>
+          </a:solidFill>
+          <a:ln>
+            <a:noFill/>
+          </a:ln>
+          <a:effectLst/>
+        </p:spPr>
+        <p:style>
+          <a:lnRef idx="1">
+            <a:schemeClr val="accent1"/>
+          </a:lnRef>
+          <a:fillRef idx="3">
+            <a:schemeClr val="accent1"/>
+          </a:fillRef>
+          <a:effectRef idx="2">
+            <a:schemeClr val="accent1"/>
+          </a:effectRef>
+          <a:fontRef idx="minor">
+            <a:schemeClr val="lt1"/>
+          </a:fontRef>
+        </p:style>
+        <p:txBody>
+          <a:bodyPr rtlCol="0" anchor="ctr"/>
+          <a:lstStyle/>
+          <a:p>
+            <a:pPr algn="ctr"/>
+          </a:p>
+        </p:txBody>
+      </p:sp>
+      <p:sp>
+        <p:nvSpPr>
+          <p:cNvPr id="6" name="TextBox 5"/>
+          <p:cNvSpPr txBox="1"/>
+          <p:nvPr/>
+        </p:nvSpPr>
+        <p:spPr>
+          <a:xfrm>
+            <a:off x="457200" y="2624400"/>
+            <a:ext cx="4320000" cy="774000"/>
+          </a:xfrm>
+          <a:prstGeom prst="rect">
+            <a:avLst/>
+          </a:prstGeom>
+          <a:noFill/>
+        </p:spPr>
+        <p:txBody>
+          <a:bodyPr wrap="square" lIns="0" rIns="0" tIns="0" bIns="0" anchor="ctr">
+            <a:spAutoFit/>
+          </a:bodyPr>
+          <a:lstStyle/>
           <a:p>
             <a:pPr algn="l">
               <a:lnSpc>
@@ -10335,21 +11328,135 @@
                 <a:spcPts val="0"/>
               </a:spcBef>
               <a:spcAft>
-                <a:spcPts val="400"/>
+                <a:spcPts val="0"/>
               </a:spcAft>
             </a:pPr>
             <a:r>
+              <a:rPr sz="1800" b="1">
+                <a:solidFill>
+                  <a:srgbClr val="1F497D"/>
+                </a:solidFill>
+                <a:latin typeface="Calibri"/>
+                <a:ea typeface="微軟正黑體"/>
+                <a:cs typeface="微軟正黑體"/>
+              </a:rPr>
+              <a:t>第二步｜訂定規則</a:t>
+            </a:r>
+          </a:p>
+        </p:txBody>
+      </p:sp>
+      <p:sp>
+        <p:nvSpPr>
+          <p:cNvPr id="7" name="TextBox 6"/>
+          <p:cNvSpPr txBox="1"/>
+          <p:nvPr/>
+        </p:nvSpPr>
+        <p:spPr>
+          <a:xfrm>
+            <a:off x="4993200" y="2624400"/>
+            <a:ext cx="6741719" cy="774000"/>
+          </a:xfrm>
+          <a:prstGeom prst="rect">
+            <a:avLst/>
+          </a:prstGeom>
+          <a:noFill/>
+        </p:spPr>
+        <p:txBody>
+          <a:bodyPr wrap="square" lIns="0" rIns="0" tIns="0" bIns="0" anchor="ctr">
+            <a:spAutoFit/>
+          </a:bodyPr>
+          <a:lstStyle/>
+          <a:p>
+            <a:pPr algn="l">
+              <a:lnSpc>
+                <a:spcPct val="130000"/>
+              </a:lnSpc>
+              <a:spcBef>
+                <a:spcPts val="0"/>
+              </a:spcBef>
+              <a:spcAft>
+                <a:spcPts val="0"/>
+              </a:spcAft>
+            </a:pPr>
+            <a:r>
               <a:rPr sz="1500" b="0">
                 <a:solidFill>
-                  <a:srgbClr val="7F8C9E"/>
-                </a:solidFill>
-                <a:latin typeface="Calibri"/>
-                <a:ea typeface="微軟正黑體"/>
-                <a:cs typeface="微軟正黑體"/>
-              </a:rPr>
-              <a:t>下一步：試點門店確認 · 操作工作坊</a:t>
-            </a:r>
-          </a:p>
+                  <a:srgbClr val="333333"/>
+                </a:solidFill>
+                <a:latin typeface="Calibri"/>
+                <a:ea typeface="微軟正黑體"/>
+                <a:cs typeface="微軟正黑體"/>
+              </a:rPr>
+              <a:t>確立服務缺口門檻與店長簽收流程。</a:t>
+            </a:r>
+          </a:p>
+        </p:txBody>
+      </p:sp>
+      <p:sp>
+        <p:nvSpPr>
+          <p:cNvPr id="8" name="Rectangle 7"/>
+          <p:cNvSpPr/>
+          <p:nvPr/>
+        </p:nvSpPr>
+        <p:spPr>
+          <a:xfrm>
+            <a:off x="457200" y="3493800"/>
+            <a:ext cx="11277719" cy="7200"/>
+          </a:xfrm>
+          <a:prstGeom prst="rect">
+            <a:avLst/>
+          </a:prstGeom>
+          <a:solidFill>
+            <a:srgbClr val="D6DEE8"/>
+          </a:solidFill>
+          <a:ln>
+            <a:noFill/>
+          </a:ln>
+          <a:effectLst/>
+        </p:spPr>
+        <p:style>
+          <a:lnRef idx="1">
+            <a:schemeClr val="accent1"/>
+          </a:lnRef>
+          <a:fillRef idx="3">
+            <a:schemeClr val="accent1"/>
+          </a:fillRef>
+          <a:effectRef idx="2">
+            <a:schemeClr val="accent1"/>
+          </a:effectRef>
+          <a:fontRef idx="minor">
+            <a:schemeClr val="lt1"/>
+          </a:fontRef>
+        </p:style>
+        <p:txBody>
+          <a:bodyPr rtlCol="0" anchor="ctr"/>
+          <a:lstStyle/>
+          <a:p>
+            <a:pPr algn="ctr"/>
+          </a:p>
+        </p:txBody>
+      </p:sp>
+      <p:sp>
+        <p:nvSpPr>
+          <p:cNvPr id="9" name="TextBox 8"/>
+          <p:cNvSpPr txBox="1"/>
+          <p:nvPr/>
+        </p:nvSpPr>
+        <p:spPr>
+          <a:xfrm>
+            <a:off x="457200" y="3596400"/>
+            <a:ext cx="4320000" cy="774000"/>
+          </a:xfrm>
+          <a:prstGeom prst="rect">
+            <a:avLst/>
+          </a:prstGeom>
+          <a:noFill/>
+        </p:spPr>
+        <p:txBody>
+          <a:bodyPr wrap="square" lIns="0" rIns="0" tIns="0" bIns="0" anchor="ctr">
+            <a:spAutoFit/>
+          </a:bodyPr>
+          <a:lstStyle/>
           <a:p>
             <a:pPr algn="l">
               <a:lnSpc>
@@ -10359,19 +11466,369 @@
                 <a:spcPts val="0"/>
               </a:spcBef>
               <a:spcAft>
-                <a:spcPts val="400"/>
+                <a:spcPts val="0"/>
               </a:spcAft>
             </a:pPr>
             <a:r>
+              <a:rPr sz="1800" b="1">
+                <a:solidFill>
+                  <a:srgbClr val="1F497D"/>
+                </a:solidFill>
+                <a:latin typeface="Calibri"/>
+                <a:ea typeface="微軟正黑體"/>
+                <a:cs typeface="微軟正黑體"/>
+              </a:rPr>
+              <a:t>第三步｜排班對接深度</a:t>
+            </a:r>
+          </a:p>
+        </p:txBody>
+      </p:sp>
+      <p:sp>
+        <p:nvSpPr>
+          <p:cNvPr id="10" name="TextBox 9"/>
+          <p:cNvSpPr txBox="1"/>
+          <p:nvPr/>
+        </p:nvSpPr>
+        <p:spPr>
+          <a:xfrm>
+            <a:off x="4993200" y="3596400"/>
+            <a:ext cx="6741719" cy="774000"/>
+          </a:xfrm>
+          <a:prstGeom prst="rect">
+            <a:avLst/>
+          </a:prstGeom>
+          <a:noFill/>
+        </p:spPr>
+        <p:txBody>
+          <a:bodyPr wrap="square" lIns="0" rIns="0" tIns="0" bIns="0" anchor="ctr">
+            <a:spAutoFit/>
+          </a:bodyPr>
+          <a:lstStyle/>
+          <a:p>
+            <a:pPr algn="l">
+              <a:lnSpc>
+                <a:spcPct val="130000"/>
+              </a:lnSpc>
+              <a:spcBef>
+                <a:spcPts val="0"/>
+              </a:spcBef>
+              <a:spcAft>
+                <a:spcPts val="0"/>
+              </a:spcAft>
+            </a:pPr>
+            <a:r>
               <a:rPr sz="1500" b="0">
                 <a:solidFill>
+                  <a:srgbClr val="333333"/>
+                </a:solidFill>
+                <a:latin typeface="Calibri"/>
+                <a:ea typeface="微軟正黑體"/>
+                <a:cs typeface="微軟正黑體"/>
+              </a:rPr>
+              <a:t>先提供建議，或需要寫回既有排班系統，兩者皆可商議。</a:t>
+            </a:r>
+          </a:p>
+        </p:txBody>
+      </p:sp>
+      <p:sp>
+        <p:nvSpPr>
+          <p:cNvPr id="11" name="Rectangle 10"/>
+          <p:cNvSpPr/>
+          <p:nvPr/>
+        </p:nvSpPr>
+        <p:spPr>
+          <a:xfrm>
+            <a:off x="457200" y="4465800"/>
+            <a:ext cx="11277719" cy="7200"/>
+          </a:xfrm>
+          <a:prstGeom prst="rect">
+            <a:avLst/>
+          </a:prstGeom>
+          <a:solidFill>
+            <a:srgbClr val="D6DEE8"/>
+          </a:solidFill>
+          <a:ln>
+            <a:noFill/>
+          </a:ln>
+          <a:effectLst/>
+        </p:spPr>
+        <p:style>
+          <a:lnRef idx="1">
+            <a:schemeClr val="accent1"/>
+          </a:lnRef>
+          <a:fillRef idx="3">
+            <a:schemeClr val="accent1"/>
+          </a:fillRef>
+          <a:effectRef idx="2">
+            <a:schemeClr val="accent1"/>
+          </a:effectRef>
+          <a:fontRef idx="minor">
+            <a:schemeClr val="lt1"/>
+          </a:fontRef>
+        </p:style>
+        <p:txBody>
+          <a:bodyPr rtlCol="0" anchor="ctr"/>
+          <a:lstStyle/>
+          <a:p>
+            <a:pPr algn="ctr"/>
+          </a:p>
+        </p:txBody>
+      </p:sp>
+      <p:sp>
+        <p:nvSpPr>
+          <p:cNvPr id="12" name="TextBox 11"/>
+          <p:cNvSpPr txBox="1"/>
+          <p:nvPr/>
+        </p:nvSpPr>
+        <p:spPr>
+          <a:xfrm>
+            <a:off x="457200" y="4568400"/>
+            <a:ext cx="4320000" cy="774000"/>
+          </a:xfrm>
+          <a:prstGeom prst="rect">
+            <a:avLst/>
+          </a:prstGeom>
+          <a:noFill/>
+        </p:spPr>
+        <p:txBody>
+          <a:bodyPr wrap="square" lIns="0" rIns="0" tIns="0" bIns="0" anchor="ctr">
+            <a:spAutoFit/>
+          </a:bodyPr>
+          <a:lstStyle/>
+          <a:p>
+            <a:pPr algn="l">
+              <a:lnSpc>
+                <a:spcPct val="118000"/>
+              </a:lnSpc>
+              <a:spcBef>
+                <a:spcPts val="0"/>
+              </a:spcBef>
+              <a:spcAft>
+                <a:spcPts val="0"/>
+              </a:spcAft>
+            </a:pPr>
+            <a:r>
+              <a:rPr sz="1800" b="1">
+                <a:solidFill>
+                  <a:srgbClr val="1F497D"/>
+                </a:solidFill>
+                <a:latin typeface="Calibri"/>
+                <a:ea typeface="微軟正黑體"/>
+                <a:cs typeface="微軟正黑體"/>
+              </a:rPr>
+              <a:t>第四步｜換入真實數據</a:t>
+            </a:r>
+          </a:p>
+        </p:txBody>
+      </p:sp>
+      <p:sp>
+        <p:nvSpPr>
+          <p:cNvPr id="13" name="TextBox 12"/>
+          <p:cNvSpPr txBox="1"/>
+          <p:nvPr/>
+        </p:nvSpPr>
+        <p:spPr>
+          <a:xfrm>
+            <a:off x="4993200" y="4568400"/>
+            <a:ext cx="6741719" cy="774000"/>
+          </a:xfrm>
+          <a:prstGeom prst="rect">
+            <a:avLst/>
+          </a:prstGeom>
+          <a:noFill/>
+        </p:spPr>
+        <p:txBody>
+          <a:bodyPr wrap="square" lIns="0" rIns="0" tIns="0" bIns="0" anchor="ctr">
+            <a:spAutoFit/>
+          </a:bodyPr>
+          <a:lstStyle/>
+          <a:p>
+            <a:pPr algn="l">
+              <a:lnSpc>
+                <a:spcPct val="130000"/>
+              </a:lnSpc>
+              <a:spcBef>
+                <a:spcPts val="0"/>
+              </a:spcBef>
+              <a:spcAft>
+                <a:spcPts val="0"/>
+              </a:spcAft>
+            </a:pPr>
+            <a:r>
+              <a:rPr sz="1500" b="0">
+                <a:solidFill>
+                  <a:srgbClr val="333333"/>
+                </a:solidFill>
+                <a:latin typeface="Calibri"/>
+                <a:ea typeface="微軟正黑體"/>
+                <a:cs typeface="微軟正黑體"/>
+              </a:rPr>
+              <a:t>試點期沿用同一套介面，以真實數據取代樣本資料。</a:t>
+            </a:r>
+          </a:p>
+        </p:txBody>
+      </p:sp>
+      <p:sp>
+        <p:nvSpPr>
+          <p:cNvPr id="14" name="TextBox 13"/>
+          <p:cNvSpPr txBox="1"/>
+          <p:nvPr/>
+        </p:nvSpPr>
+        <p:spPr>
+          <a:xfrm>
+            <a:off x="457200" y="5576400"/>
+            <a:ext cx="11277719" cy="324000"/>
+          </a:xfrm>
+          <a:prstGeom prst="rect">
+            <a:avLst/>
+          </a:prstGeom>
+          <a:noFill/>
+        </p:spPr>
+        <p:txBody>
+          <a:bodyPr wrap="square" lIns="0" rIns="0" tIns="0" bIns="0">
+            <a:spAutoFit/>
+          </a:bodyPr>
+          <a:lstStyle/>
+          <a:p>
+            <a:pPr algn="l">
+              <a:lnSpc>
+                <a:spcPct val="118000"/>
+              </a:lnSpc>
+              <a:spcBef>
+                <a:spcPts val="0"/>
+              </a:spcBef>
+              <a:spcAft>
+                <a:spcPts val="0"/>
+              </a:spcAft>
+            </a:pPr>
+            <a:r>
+              <a:rPr sz="1500" b="1">
+                <a:solidFill>
+                  <a:srgbClr val="1F497D"/>
+                </a:solidFill>
+                <a:latin typeface="Calibri"/>
+                <a:ea typeface="微軟正黑體"/>
+                <a:cs typeface="微軟正黑體"/>
+              </a:rPr>
+              <a:t>請貴司考慮決定：試點門店與時間窗口、對接窗口（營運與資訊）、是否安排操作工作坊。</a:t>
+            </a:r>
+          </a:p>
+        </p:txBody>
+      </p:sp>
+      <p:sp>
+        <p:nvSpPr>
+          <p:cNvPr id="15" name="TextBox 14"/>
+          <p:cNvSpPr txBox="1"/>
+          <p:nvPr/>
+        </p:nvSpPr>
+        <p:spPr>
+          <a:xfrm>
+            <a:off x="457200" y="6357600"/>
+            <a:ext cx="2134800" cy="363600"/>
+          </a:xfrm>
+          <a:prstGeom prst="rect">
+            <a:avLst/>
+          </a:prstGeom>
+          <a:noFill/>
+        </p:spPr>
+        <p:txBody>
+          <a:bodyPr wrap="square" lIns="0" rIns="0" tIns="0" bIns="0" anchor="ctr">
+            <a:spAutoFit/>
+          </a:bodyPr>
+          <a:lstStyle/>
+          <a:p/>
+        </p:txBody>
+      </p:sp>
+      <p:sp>
+        <p:nvSpPr>
+          <p:cNvPr id="16" name="TextBox 15"/>
+          <p:cNvSpPr txBox="1"/>
+          <p:nvPr/>
+        </p:nvSpPr>
+        <p:spPr>
+          <a:xfrm>
+            <a:off x="3124800" y="6357600"/>
+            <a:ext cx="2894399" cy="363600"/>
+          </a:xfrm>
+          <a:prstGeom prst="rect">
+            <a:avLst/>
+          </a:prstGeom>
+          <a:noFill/>
+        </p:spPr>
+        <p:txBody>
+          <a:bodyPr wrap="square" lIns="0" rIns="0" tIns="0" bIns="0" anchor="ctr">
+            <a:spAutoFit/>
+          </a:bodyPr>
+          <a:lstStyle/>
+          <a:p>
+            <a:pPr algn="ctr">
+              <a:lnSpc>
+                <a:spcPct val="118000"/>
+              </a:lnSpc>
+              <a:spcBef>
+                <a:spcPts val="0"/>
+              </a:spcBef>
+              <a:spcAft>
+                <a:spcPts val="0"/>
+              </a:spcAft>
+            </a:pPr>
+            <a:r>
+              <a:rPr sz="1100" b="0">
+                <a:solidFill>
                   <a:srgbClr val="7F8C9E"/>
                 </a:solidFill>
                 <a:latin typeface="Calibri"/>
                 <a:ea typeface="微軟正黑體"/>
                 <a:cs typeface="微軟正黑體"/>
               </a:rPr>
-              <a:t>示範畫面 · 樣本資料</a:t>
+              <a:t>HKIT 智域 × 百度一見</a:t>
+            </a:r>
+          </a:p>
+        </p:txBody>
+      </p:sp>
+      <p:sp>
+        <p:nvSpPr>
+          <p:cNvPr id="17" name="TextBox 16"/>
+          <p:cNvSpPr txBox="1"/>
+          <p:nvPr/>
+        </p:nvSpPr>
+        <p:spPr>
+          <a:xfrm>
+            <a:off x="6552000" y="6357600"/>
+            <a:ext cx="2134800" cy="363600"/>
+          </a:xfrm>
+          <a:prstGeom prst="rect">
+            <a:avLst/>
+          </a:prstGeom>
+          <a:noFill/>
+        </p:spPr>
+        <p:txBody>
+          <a:bodyPr wrap="square" lIns="0" rIns="0" tIns="0" bIns="0" anchor="ctr">
+            <a:spAutoFit/>
+          </a:bodyPr>
+          <a:lstStyle/>
+          <a:p>
+            <a:pPr algn="r">
+              <a:lnSpc>
+                <a:spcPct val="118000"/>
+              </a:lnSpc>
+              <a:spcBef>
+                <a:spcPts val="0"/>
+              </a:spcBef>
+              <a:spcAft>
+                <a:spcPts val="0"/>
+              </a:spcAft>
+            </a:pPr>
+            <a:r>
+              <a:rPr sz="1100" b="0">
+                <a:solidFill>
+                  <a:srgbClr val="7F8C9E"/>
+                </a:solidFill>
+                <a:latin typeface="Calibri"/>
+                <a:ea typeface="微軟正黑體"/>
+                <a:cs typeface="微軟正黑體"/>
+              </a:rPr>
+              <a:t>19</a:t>
             </a:r>
           </a:p>
         </p:txBody>
@@ -10900,6 +12357,141 @@
                 <a:cs typeface="微軟正黑體"/>
               </a:rPr>
               <a:t>2</a:t>
+            </a:r>
+          </a:p>
+        </p:txBody>
+      </p:sp>
+    </p:spTree>
+  </p:cSld>
+  <p:clrMapOvr>
+    <a:masterClrMapping/>
+  </p:clrMapOvr>
+</p:sld>
+</file>
+
+<file path=ppt/slides/slide20.xml><?xml version="1.0" encoding="utf-8"?>
+<p:sld xmlns:a="http://schemas.openxmlformats.org/drawingml/2006/main" xmlns:p="http://schemas.openxmlformats.org/presentationml/2006/main" xmlns:r="http://schemas.openxmlformats.org/officeDocument/2006/relationships">
+  <p:cSld>
+    <p:spTree>
+      <p:nvGrpSpPr>
+        <p:cNvPr id="1" name=""/>
+        <p:cNvGrpSpPr/>
+        <p:nvPr/>
+      </p:nvGrpSpPr>
+      <p:grpSpPr/>
+      <p:sp>
+        <p:nvSpPr>
+          <p:cNvPr id="2" name="Title 1"/>
+          <p:cNvSpPr>
+            <a:spLocks noGrp="1"/>
+          </p:cNvSpPr>
+          <p:nvPr>
+            <p:ph type="ctrTitle"/>
+          </p:nvPr>
+        </p:nvSpPr>
+        <p:spPr/>
+        <p:txBody>
+          <a:bodyPr/>
+          <a:lstStyle/>
+          <a:p>
+            <a:r>
+              <a:rPr sz="4400" b="1">
+                <a:solidFill>
+                  <a:srgbClr val="1F497D"/>
+                </a:solidFill>
+                <a:latin typeface="Calibri"/>
+                <a:ea typeface="微軟正黑體"/>
+                <a:cs typeface="微軟正黑體"/>
+              </a:rPr>
+              <a:t>多謝</a:t>
+            </a:r>
+          </a:p>
+        </p:txBody>
+      </p:sp>
+      <p:sp>
+        <p:nvSpPr>
+          <p:cNvPr id="3" name="Subtitle 2"/>
+          <p:cNvSpPr>
+            <a:spLocks noGrp="1"/>
+          </p:cNvSpPr>
+          <p:nvPr>
+            <p:ph type="subTitle" idx="1"/>
+          </p:nvPr>
+        </p:nvSpPr>
+        <p:spPr/>
+        <p:txBody>
+          <a:bodyPr wrap="square"/>
+          <a:lstStyle/>
+          <a:p>
+            <a:pPr algn="l">
+              <a:lnSpc>
+                <a:spcPct val="118000"/>
+              </a:lnSpc>
+              <a:spcBef>
+                <a:spcPts val="0"/>
+              </a:spcBef>
+              <a:spcAft>
+                <a:spcPts val="1800"/>
+              </a:spcAft>
+            </a:pPr>
+            <a:r>
+              <a:rPr sz="2600" b="1">
+                <a:solidFill>
+                  <a:srgbClr val="1F497D"/>
+                </a:solidFill>
+                <a:latin typeface="Calibri"/>
+                <a:ea typeface="微軟正黑體"/>
+                <a:cs typeface="微軟正黑體"/>
+              </a:rPr>
+              <a:t>HKIT 智域 × 百度一見</a:t>
+            </a:r>
+          </a:p>
+          <a:p>
+            <a:pPr algn="l">
+              <a:lnSpc>
+                <a:spcPct val="118000"/>
+              </a:lnSpc>
+              <a:spcBef>
+                <a:spcPts val="0"/>
+              </a:spcBef>
+              <a:spcAft>
+                <a:spcPts val="400"/>
+              </a:spcAft>
+            </a:pPr>
+            <a:r>
+              <a:rPr sz="1500" b="0">
+                <a:solidFill>
+                  <a:srgbClr val="7F8C9E"/>
+                </a:solidFill>
+                <a:latin typeface="Calibri"/>
+                <a:ea typeface="微軟正黑體"/>
+                <a:cs typeface="微軟正黑體"/>
+              </a:rPr>
+              <a:t>下一步：試點門店確認 · 操作工作坊</a:t>
+            </a:r>
+          </a:p>
+          <a:p>
+            <a:pPr algn="l">
+              <a:lnSpc>
+                <a:spcPct val="118000"/>
+              </a:lnSpc>
+              <a:spcBef>
+                <a:spcPts val="0"/>
+              </a:spcBef>
+              <a:spcAft>
+                <a:spcPts val="400"/>
+              </a:spcAft>
+            </a:pPr>
+            <a:r>
+              <a:rPr sz="1500" b="0">
+                <a:solidFill>
+                  <a:srgbClr val="7F8C9E"/>
+                </a:solidFill>
+                <a:latin typeface="Calibri"/>
+                <a:ea typeface="微軟正黑體"/>
+                <a:cs typeface="微軟正黑體"/>
+              </a:rPr>
+              <a:t>示範畫面 · 樣本資料</a:t>
             </a:r>
           </a:p>
         </p:txBody>
@@ -13366,7 +14958,7 @@
         </p:nvGraphicFramePr>
         <p:xfrm>
           <a:off x="457200" y="1742400"/>
-          <a:ext cx="11277719" cy="1890000"/>
+          <a:ext cx="11277719" cy="3024000"/>
         </p:xfrm>
         <a:graphic>
           <a:graphicData uri="http://schemas.openxmlformats.org/drawingml/2006/table">
@@ -13546,7 +15138,7 @@
                           <a:ea typeface="微軟正黑體"/>
                           <a:cs typeface="微軟正黑體"/>
                         </a:rPr>
-                        <a:t>不承諾控制商場中央空調</a:t>
+                        <a:t>不提供真實影像回放</a:t>
                       </a:r>
                     </a:p>
                   </a:txBody>
@@ -13581,7 +15173,7 @@
                           <a:ea typeface="微軟正黑體"/>
                           <a:cs typeface="微軟正黑體"/>
                         </a:rPr>
-                        <a:t>無設備控制權則不作此主張</a:t>
+                        <a:t>試點以人流與更表推算，並非影像偵測</a:t>
                       </a:r>
                     </a:p>
                   </a:txBody>
@@ -13618,7 +15210,7 @@
                           <a:ea typeface="微軟正黑體"/>
                           <a:cs typeface="微軟正黑體"/>
                         </a:rPr>
-                        <a:t>不一期覆蓋全港門店</a:t>
+                        <a:t>不代寫教練評語</a:t>
                       </a:r>
                     </a:p>
                   </a:txBody>
@@ -13653,7 +15245,7 @@
                           <a:ea typeface="微軟正黑體"/>
                           <a:cs typeface="微軟正黑體"/>
                         </a:rPr>
-                        <a:t>以一店試點驗證為先</a:t>
+                        <a:t>教練觀察由店長判斷並撰寫</a:t>
                       </a:r>
                     </a:p>
                   </a:txBody>
@@ -13690,7 +15282,7 @@
                           <a:ea typeface="微軟正黑體"/>
                           <a:cs typeface="微軟正黑體"/>
                         </a:rPr>
-                        <a:t>不在本階段標定報價數字</a:t>
+                        <a:t>不推送通知至員工手機</a:t>
                       </a:r>
                     </a:p>
                   </a:txBody>
@@ -13725,7 +15317,7 @@
                           <a:ea typeface="微軟正黑體"/>
                           <a:cs typeface="微軟正黑體"/>
                         </a:rPr>
-                        <a:t>範圍未定則價格無意義</a:t>
+                        <a:t>員工端應用不在本期範圍</a:t>
                       </a:r>
                     </a:p>
                   </a:txBody>
@@ -13736,6 +15328,222 @@
                   </a:tcPr>
                 </a:tc>
               </a:tr>
+              <a:tr h="378000">
+                <a:tc>
+                  <a:txBody>
+                    <a:bodyPr wrap="square"/>
+                    <a:lstStyle/>
+                    <a:p>
+                      <a:pPr algn="l">
+                        <a:lnSpc>
+                          <a:spcPct val="115000"/>
+                        </a:lnSpc>
+                        <a:spcBef>
+                          <a:spcPts val="0"/>
+                        </a:spcBef>
+                        <a:spcAft>
+                          <a:spcPts val="0"/>
+                        </a:spcAft>
+                      </a:pPr>
+                      <a:r>
+                        <a:rPr sz="1500" b="0">
+                          <a:solidFill>
+                            <a:srgbClr val="333333"/>
+                          </a:solidFill>
+                          <a:latin typeface="Calibri"/>
+                          <a:ea typeface="微軟正黑體"/>
+                          <a:cs typeface="微軟正黑體"/>
+                        </a:rPr>
+                        <a:t>不承諾控制商場中央空調</a:t>
+                      </a:r>
+                    </a:p>
+                  </a:txBody>
+                  <a:tcPr marL="125999" marR="125999" marT="43200" marB="43200" anchor="ctr">
+                    <a:solidFill>
+                      <a:srgbClr val="FFFFFF"/>
+                    </a:solidFill>
+                  </a:tcPr>
+                </a:tc>
+                <a:tc>
+                  <a:txBody>
+                    <a:bodyPr wrap="square"/>
+                    <a:lstStyle/>
+                    <a:p>
+                      <a:pPr algn="l">
+                        <a:lnSpc>
+                          <a:spcPct val="115000"/>
+                        </a:lnSpc>
+                        <a:spcBef>
+                          <a:spcPts val="0"/>
+                        </a:spcBef>
+                        <a:spcAft>
+                          <a:spcPts val="0"/>
+                        </a:spcAft>
+                      </a:pPr>
+                      <a:r>
+                        <a:rPr sz="1500" b="0">
+                          <a:solidFill>
+                            <a:srgbClr val="333333"/>
+                          </a:solidFill>
+                          <a:latin typeface="Calibri"/>
+                          <a:ea typeface="微軟正黑體"/>
+                          <a:cs typeface="微軟正黑體"/>
+                        </a:rPr>
+                        <a:t>無設備控制權則不作此主張</a:t>
+                      </a:r>
+                    </a:p>
+                  </a:txBody>
+                  <a:tcPr marL="125999" marR="125999" marT="43200" marB="43200" anchor="ctr">
+                    <a:solidFill>
+                      <a:srgbClr val="FFFFFF"/>
+                    </a:solidFill>
+                  </a:tcPr>
+                </a:tc>
+              </a:tr>
+              <a:tr h="378000">
+                <a:tc>
+                  <a:txBody>
+                    <a:bodyPr wrap="square"/>
+                    <a:lstStyle/>
+                    <a:p>
+                      <a:pPr algn="l">
+                        <a:lnSpc>
+                          <a:spcPct val="115000"/>
+                        </a:lnSpc>
+                        <a:spcBef>
+                          <a:spcPts val="0"/>
+                        </a:spcBef>
+                        <a:spcAft>
+                          <a:spcPts val="0"/>
+                        </a:spcAft>
+                      </a:pPr>
+                      <a:r>
+                        <a:rPr sz="1500" b="0">
+                          <a:solidFill>
+                            <a:srgbClr val="333333"/>
+                          </a:solidFill>
+                          <a:latin typeface="Calibri"/>
+                          <a:ea typeface="微軟正黑體"/>
+                          <a:cs typeface="微軟正黑體"/>
+                        </a:rPr>
+                        <a:t>不一期覆蓋全港門店</a:t>
+                      </a:r>
+                    </a:p>
+                  </a:txBody>
+                  <a:tcPr marL="125999" marR="125999" marT="43200" marB="43200" anchor="ctr">
+                    <a:solidFill>
+                      <a:srgbClr val="F2F6FA"/>
+                    </a:solidFill>
+                  </a:tcPr>
+                </a:tc>
+                <a:tc>
+                  <a:txBody>
+                    <a:bodyPr wrap="square"/>
+                    <a:lstStyle/>
+                    <a:p>
+                      <a:pPr algn="l">
+                        <a:lnSpc>
+                          <a:spcPct val="115000"/>
+                        </a:lnSpc>
+                        <a:spcBef>
+                          <a:spcPts val="0"/>
+                        </a:spcBef>
+                        <a:spcAft>
+                          <a:spcPts val="0"/>
+                        </a:spcAft>
+                      </a:pPr>
+                      <a:r>
+                        <a:rPr sz="1500" b="0">
+                          <a:solidFill>
+                            <a:srgbClr val="333333"/>
+                          </a:solidFill>
+                          <a:latin typeface="Calibri"/>
+                          <a:ea typeface="微軟正黑體"/>
+                          <a:cs typeface="微軟正黑體"/>
+                        </a:rPr>
+                        <a:t>以一店試點驗證為先</a:t>
+                      </a:r>
+                    </a:p>
+                  </a:txBody>
+                  <a:tcPr marL="125999" marR="125999" marT="43200" marB="43200" anchor="ctr">
+                    <a:solidFill>
+                      <a:srgbClr val="F2F6FA"/>
+                    </a:solidFill>
+                  </a:tcPr>
+                </a:tc>
+              </a:tr>
+              <a:tr h="378000">
+                <a:tc>
+                  <a:txBody>
+                    <a:bodyPr wrap="square"/>
+                    <a:lstStyle/>
+                    <a:p>
+                      <a:pPr algn="l">
+                        <a:lnSpc>
+                          <a:spcPct val="115000"/>
+                        </a:lnSpc>
+                        <a:spcBef>
+                          <a:spcPts val="0"/>
+                        </a:spcBef>
+                        <a:spcAft>
+                          <a:spcPts val="0"/>
+                        </a:spcAft>
+                      </a:pPr>
+                      <a:r>
+                        <a:rPr sz="1500" b="0">
+                          <a:solidFill>
+                            <a:srgbClr val="333333"/>
+                          </a:solidFill>
+                          <a:latin typeface="Calibri"/>
+                          <a:ea typeface="微軟正黑體"/>
+                          <a:cs typeface="微軟正黑體"/>
+                        </a:rPr>
+                        <a:t>不在本階段標定報價數字</a:t>
+                      </a:r>
+                    </a:p>
+                  </a:txBody>
+                  <a:tcPr marL="125999" marR="125999" marT="43200" marB="43200" anchor="ctr">
+                    <a:solidFill>
+                      <a:srgbClr val="FFFFFF"/>
+                    </a:solidFill>
+                  </a:tcPr>
+                </a:tc>
+                <a:tc>
+                  <a:txBody>
+                    <a:bodyPr wrap="square"/>
+                    <a:lstStyle/>
+                    <a:p>
+                      <a:pPr algn="l">
+                        <a:lnSpc>
+                          <a:spcPct val="115000"/>
+                        </a:lnSpc>
+                        <a:spcBef>
+                          <a:spcPts val="0"/>
+                        </a:spcBef>
+                        <a:spcAft>
+                          <a:spcPts val="0"/>
+                        </a:spcAft>
+                      </a:pPr>
+                      <a:r>
+                        <a:rPr sz="1500" b="0">
+                          <a:solidFill>
+                            <a:srgbClr val="333333"/>
+                          </a:solidFill>
+                          <a:latin typeface="Calibri"/>
+                          <a:ea typeface="微軟正黑體"/>
+                          <a:cs typeface="微軟正黑體"/>
+                        </a:rPr>
+                        <a:t>範圍未定則價格無意義</a:t>
+                      </a:r>
+                    </a:p>
+                  </a:txBody>
+                  <a:tcPr marL="125999" marR="125999" marT="43200" marB="43200" anchor="ctr">
+                    <a:solidFill>
+                      <a:srgbClr val="FFFFFF"/>
+                    </a:solidFill>
+                  </a:tcPr>
+                </a:tc>
+              </a:tr>
             </a:tbl>
           </a:graphicData>
         </a:graphic>
@@ -13748,7 +15556,7 @@
         </p:nvSpPr>
         <p:spPr>
           <a:xfrm>
-            <a:off x="457200" y="3830400"/>
+            <a:off x="457200" y="4964400"/>
             <a:ext cx="11277719" cy="324000"/>
           </a:xfrm>
           <a:prstGeom prst="rect">
